--- a/docs/교육자료/03_ToolCalling.pptx
+++ b/docs/교육자료/03_ToolCalling.pptx
@@ -2056,6 +2056,10 @@
             <a:prstDash val="solid"/>
           </a:ln>
         </p:spPr>
+        <p:txBody>
+          <a:bodyPr/>
+          <a:p/>
+        </p:txBody>
       </p:sp>
       <p:sp>
         <p:nvSpPr>
@@ -2081,6 +2085,10 @@
             <a:prstDash val="solid"/>
           </a:ln>
         </p:spPr>
+        <p:txBody>
+          <a:bodyPr/>
+          <a:p/>
+        </p:txBody>
       </p:sp>
       <p:sp>
         <p:nvSpPr>
@@ -2248,6 +2256,10 @@
             <a:prstDash val="solid"/>
           </a:ln>
         </p:spPr>
+        <p:txBody>
+          <a:bodyPr/>
+          <a:p/>
+        </p:txBody>
       </p:sp>
       <p:sp>
         <p:nvSpPr>
@@ -2311,6 +2323,10 @@
             <a:tailEnd type="triangle"/>
           </a:ln>
         </p:spPr>
+        <p:txBody>
+          <a:bodyPr/>
+          <a:p/>
+        </p:txBody>
       </p:sp>
       <p:sp>
         <p:nvSpPr>
@@ -2338,6 +2354,10 @@
             <a:prstDash val="solid"/>
           </a:ln>
         </p:spPr>
+        <p:txBody>
+          <a:bodyPr/>
+          <a:p/>
+        </p:txBody>
       </p:sp>
       <p:sp>
         <p:nvSpPr>
@@ -2401,6 +2421,10 @@
             <a:tailEnd type="triangle"/>
           </a:ln>
         </p:spPr>
+        <p:txBody>
+          <a:bodyPr/>
+          <a:p/>
+        </p:txBody>
       </p:sp>
       <p:sp>
         <p:nvSpPr>
@@ -2428,6 +2452,10 @@
             <a:prstDash val="solid"/>
           </a:ln>
         </p:spPr>
+        <p:txBody>
+          <a:bodyPr/>
+          <a:p/>
+        </p:txBody>
       </p:sp>
       <p:sp>
         <p:nvSpPr>
@@ -2491,6 +2519,10 @@
             <a:tailEnd type="triangle"/>
           </a:ln>
         </p:spPr>
+        <p:txBody>
+          <a:bodyPr/>
+          <a:p/>
+        </p:txBody>
       </p:sp>
       <p:sp>
         <p:nvSpPr>
@@ -2518,6 +2550,10 @@
             <a:prstDash val="solid"/>
           </a:ln>
         </p:spPr>
+        <p:txBody>
+          <a:bodyPr/>
+          <a:p/>
+        </p:txBody>
       </p:sp>
       <p:sp>
         <p:nvSpPr>
@@ -3989,6 +4025,10 @@
             </a:outerShdw>
           </a:effectLst>
         </p:spPr>
+        <p:txBody>
+          <a:bodyPr/>
+          <a:p/>
+        </p:txBody>
       </p:sp>
       <p:sp>
         <p:nvSpPr>
@@ -4014,6 +4054,10 @@
             <a:prstDash val="solid"/>
           </a:ln>
         </p:spPr>
+        <p:txBody>
+          <a:bodyPr/>
+          <a:p/>
+        </p:txBody>
       </p:sp>
       <p:sp>
         <p:nvSpPr>
@@ -4039,6 +4083,10 @@
             <a:prstDash val="solid"/>
           </a:ln>
         </p:spPr>
+        <p:txBody>
+          <a:bodyPr/>
+          <a:p/>
+        </p:txBody>
       </p:sp>
       <p:sp>
         <p:nvSpPr>
@@ -4064,6 +4112,10 @@
             <a:prstDash val="solid"/>
           </a:ln>
         </p:spPr>
+        <p:txBody>
+          <a:bodyPr/>
+          <a:p/>
+        </p:txBody>
       </p:sp>
       <p:sp>
         <p:nvSpPr>
@@ -4095,13 +4147,274 @@
             <a:r>
               <a:rPr lang="en-US" sz="900" dirty="0">
                 <a:solidFill>
-                  <a:srgbClr val="D4D4D4"/>
-                </a:solidFill>
-                <a:latin typeface="Courier New" pitchFamily="34" charset="0"/>
-                <a:ea typeface="Courier New" pitchFamily="34" charset="-122"/>
-                <a:cs typeface="Courier New" pitchFamily="34" charset="-120"/>
-              </a:rPr>
-              <a:t>        @</a:t>
+                  <a:srgbClr val="569CD6"/>
+                </a:solidFill>
+                <a:latin typeface="Courier New" pitchFamily="34" charset="0"/>
+                <a:ea typeface="Courier New" pitchFamily="34" charset="-122"/>
+                <a:cs typeface="Courier New" pitchFamily="34" charset="-120"/>
+              </a:rPr>
+              <a:t>def</a:t>
+            </a:r>
+            <a:pPr algn="l" indent="0" marL="0">
+              <a:lnSpc>
+                <a:spcPct val="108000"/>
+              </a:lnSpc>
+              <a:buNone/>
+            </a:pPr>
+            <a:r>
+              <a:rPr lang="en-US" sz="900" dirty="0">
+                <a:solidFill>
+                  <a:srgbClr val="D4D4D4"/>
+                </a:solidFill>
+                <a:latin typeface="Courier New" pitchFamily="34" charset="0"/>
+                <a:ea typeface="Courier New" pitchFamily="34" charset="-122"/>
+                <a:cs typeface="Courier New" pitchFamily="34" charset="-120"/>
+              </a:rPr>
+              <a:t> </a:t>
+            </a:r>
+            <a:pPr algn="l" indent="0" marL="0">
+              <a:lnSpc>
+                <a:spcPct val="108000"/>
+              </a:lnSpc>
+              <a:buNone/>
+            </a:pPr>
+            <a:r>
+              <a:rPr lang="en-US" sz="900" dirty="0">
+                <a:solidFill>
+                  <a:srgbClr val="DCDCAA"/>
+                </a:solidFill>
+                <a:latin typeface="Courier New" pitchFamily="34" charset="0"/>
+                <a:ea typeface="Courier New" pitchFamily="34" charset="-122"/>
+                <a:cs typeface="Courier New" pitchFamily="34" charset="-120"/>
+              </a:rPr>
+              <a:t>step_6</a:t>
+            </a:r>
+            <a:pPr algn="l" indent="0" marL="0">
+              <a:lnSpc>
+                <a:spcPct val="108000"/>
+              </a:lnSpc>
+              <a:buNone/>
+            </a:pPr>
+            <a:r>
+              <a:rPr lang="en-US" sz="900" dirty="0">
+                <a:solidFill>
+                  <a:srgbClr val="D4D4D4"/>
+                </a:solidFill>
+                <a:latin typeface="Courier New" pitchFamily="34" charset="0"/>
+                <a:ea typeface="Courier New" pitchFamily="34" charset="-122"/>
+                <a:cs typeface="Courier New" pitchFamily="34" charset="-120"/>
+              </a:rPr>
+              <a:t>(</a:t>
+            </a:r>
+            <a:pPr algn="l" indent="0" marL="0">
+              <a:lnSpc>
+                <a:spcPct val="108000"/>
+              </a:lnSpc>
+              <a:buNone/>
+            </a:pPr>
+            <a:r>
+              <a:rPr lang="en-US" sz="900" dirty="0">
+                <a:solidFill>
+                  <a:srgbClr val="D4D4D4"/>
+                </a:solidFill>
+                <a:latin typeface="Courier New" pitchFamily="34" charset="0"/>
+                <a:ea typeface="Courier New" pitchFamily="34" charset="-122"/>
+                <a:cs typeface="Courier New" pitchFamily="34" charset="-120"/>
+              </a:rPr>
+              <a:t>model</a:t>
+            </a:r>
+            <a:pPr algn="l" indent="0" marL="0">
+              <a:lnSpc>
+                <a:spcPct val="108000"/>
+              </a:lnSpc>
+              <a:buNone/>
+            </a:pPr>
+            <a:r>
+              <a:rPr lang="en-US" sz="900" dirty="0">
+                <a:solidFill>
+                  <a:srgbClr val="D4D4D4"/>
+                </a:solidFill>
+                <a:latin typeface="Courier New" pitchFamily="34" charset="0"/>
+                <a:ea typeface="Courier New" pitchFamily="34" charset="-122"/>
+                <a:cs typeface="Courier New" pitchFamily="34" charset="-120"/>
+              </a:rPr>
+              <a:t>) -&gt; </a:t>
+            </a:r>
+            <a:pPr algn="l" indent="0" marL="0">
+              <a:lnSpc>
+                <a:spcPct val="108000"/>
+              </a:lnSpc>
+              <a:buNone/>
+            </a:pPr>
+            <a:r>
+              <a:rPr lang="en-US" sz="900" dirty="0">
+                <a:solidFill>
+                  <a:srgbClr val="569CD6"/>
+                </a:solidFill>
+                <a:latin typeface="Courier New" pitchFamily="34" charset="0"/>
+                <a:ea typeface="Courier New" pitchFamily="34" charset="-122"/>
+                <a:cs typeface="Courier New" pitchFamily="34" charset="-120"/>
+              </a:rPr>
+              <a:t>None</a:t>
+            </a:r>
+            <a:pPr algn="l" indent="0" marL="0">
+              <a:lnSpc>
+                <a:spcPct val="108000"/>
+              </a:lnSpc>
+              <a:buNone/>
+            </a:pPr>
+            <a:r>
+              <a:rPr lang="en-US" sz="900" dirty="0">
+                <a:solidFill>
+                  <a:srgbClr val="D4D4D4"/>
+                </a:solidFill>
+                <a:latin typeface="Courier New" pitchFamily="34" charset="0"/>
+                <a:ea typeface="Courier New" pitchFamily="34" charset="-122"/>
+                <a:cs typeface="Courier New" pitchFamily="34" charset="-120"/>
+              </a:rPr>
+              <a:t>:</a:t>
+            </a:r>
+            <a:endParaRPr lang="en-US" sz="950" dirty="0"/>
+          </a:p>
+          <a:p>
+            <a:pPr algn="l" indent="0" marL="0">
+              <a:lnSpc>
+                <a:spcPct val="108000"/>
+              </a:lnSpc>
+              <a:buNone/>
+            </a:pPr>
+            <a:r>
+              <a:rPr lang="en-US" sz="900" dirty="0">
+                <a:solidFill>
+                  <a:srgbClr val="D4D4D4"/>
+                </a:solidFill>
+                <a:latin typeface="Courier New" pitchFamily="34" charset="0"/>
+                <a:ea typeface="Courier New" pitchFamily="34" charset="-122"/>
+                <a:cs typeface="Courier New" pitchFamily="34" charset="-120"/>
+              </a:rPr>
+              <a:t>    </a:t>
+            </a:r>
+            <a:pPr algn="l" indent="0" marL="0">
+              <a:lnSpc>
+                <a:spcPct val="108000"/>
+              </a:lnSpc>
+              <a:buNone/>
+            </a:pPr>
+            <a:r>
+              <a:rPr lang="en-US" sz="900" dirty="0">
+                <a:solidFill>
+                  <a:srgbClr val="D4D4D4"/>
+                </a:solidFill>
+                <a:latin typeface="Courier New" pitchFamily="34" charset="0"/>
+                <a:ea typeface="Courier New" pitchFamily="34" charset="-122"/>
+                <a:cs typeface="Courier New" pitchFamily="34" charset="-120"/>
+              </a:rPr>
+              <a:t>sheet</a:t>
+            </a:r>
+            <a:pPr algn="l" indent="0" marL="0">
+              <a:lnSpc>
+                <a:spcPct val="108000"/>
+              </a:lnSpc>
+              <a:buNone/>
+            </a:pPr>
+            <a:r>
+              <a:rPr lang="en-US" sz="900" dirty="0">
+                <a:solidFill>
+                  <a:srgbClr val="D4D4D4"/>
+                </a:solidFill>
+                <a:latin typeface="Courier New" pitchFamily="34" charset="0"/>
+                <a:ea typeface="Courier New" pitchFamily="34" charset="-122"/>
+                <a:cs typeface="Courier New" pitchFamily="34" charset="-120"/>
+              </a:rPr>
+              <a:t> = </a:t>
+            </a:r>
+            <a:pPr algn="l" indent="0" marL="0">
+              <a:lnSpc>
+                <a:spcPct val="108000"/>
+              </a:lnSpc>
+              <a:buNone/>
+            </a:pPr>
+            <a:r>
+              <a:rPr lang="en-US" sz="900" dirty="0">
+                <a:solidFill>
+                  <a:srgbClr val="D4D4D4"/>
+                </a:solidFill>
+                <a:latin typeface="Courier New" pitchFamily="34" charset="0"/>
+                <a:ea typeface="Courier New" pitchFamily="34" charset="-122"/>
+                <a:cs typeface="Courier New" pitchFamily="34" charset="-120"/>
+              </a:rPr>
+              <a:t>book</a:t>
+            </a:r>
+            <a:pPr algn="l" indent="0" marL="0">
+              <a:lnSpc>
+                <a:spcPct val="108000"/>
+              </a:lnSpc>
+              <a:buNone/>
+            </a:pPr>
+            <a:r>
+              <a:rPr lang="en-US" sz="900" dirty="0">
+                <a:solidFill>
+                  <a:srgbClr val="D4D4D4"/>
+                </a:solidFill>
+                <a:latin typeface="Courier New" pitchFamily="34" charset="0"/>
+                <a:ea typeface="Courier New" pitchFamily="34" charset="-122"/>
+                <a:cs typeface="Courier New" pitchFamily="34" charset="-120"/>
+              </a:rPr>
+              <a:t>.</a:t>
+            </a:r>
+            <a:pPr algn="l" indent="0" marL="0">
+              <a:lnSpc>
+                <a:spcPct val="108000"/>
+              </a:lnSpc>
+              <a:buNone/>
+            </a:pPr>
+            <a:r>
+              <a:rPr lang="en-US" sz="900" dirty="0">
+                <a:solidFill>
+                  <a:srgbClr val="D4D4D4"/>
+                </a:solidFill>
+                <a:latin typeface="Courier New" pitchFamily="34" charset="0"/>
+                <a:ea typeface="Courier New" pitchFamily="34" charset="-122"/>
+                <a:cs typeface="Courier New" pitchFamily="34" charset="-120"/>
+              </a:rPr>
+              <a:t>sheets</a:t>
+            </a:r>
+            <a:pPr algn="l" indent="0" marL="0">
+              <a:lnSpc>
+                <a:spcPct val="108000"/>
+              </a:lnSpc>
+              <a:buNone/>
+            </a:pPr>
+            <a:r>
+              <a:rPr lang="en-US" sz="900" dirty="0">
+                <a:solidFill>
+                  <a:srgbClr val="D4D4D4"/>
+                </a:solidFill>
+                <a:latin typeface="Courier New" pitchFamily="34" charset="0"/>
+                <a:ea typeface="Courier New" pitchFamily="34" charset="-122"/>
+                <a:cs typeface="Courier New" pitchFamily="34" charset="-120"/>
+              </a:rPr>
+              <a:t>[0]</a:t>
+            </a:r>
+            <a:endParaRPr lang="en-US" sz="900" dirty="0"/>
+          </a:p>
+          <a:p>
+            <a:pPr algn="l" indent="0" marL="0">
+              <a:lnSpc>
+                <a:spcPct val="108000"/>
+              </a:lnSpc>
+              <a:buNone/>
+            </a:pPr>
+            <a:r>
+              <a:rPr lang="en-US" sz="900" dirty="0">
+                <a:solidFill>
+                  <a:srgbClr val="D4D4D4"/>
+                </a:solidFill>
+                <a:latin typeface="Courier New" pitchFamily="34" charset="0"/>
+                <a:ea typeface="Courier New" pitchFamily="34" charset="-122"/>
+                <a:cs typeface="Courier New" pitchFamily="34" charset="-120"/>
+              </a:rPr>
+              <a:t>    @</a:t>
             </a:r>
             <a:pPr algn="l" indent="0" marL="0">
               <a:lnSpc>
@@ -4138,6 +4451,264 @@
                 <a:ea typeface="Courier New" pitchFamily="34" charset="-122"/>
                 <a:cs typeface="Courier New" pitchFamily="34" charset="-120"/>
               </a:rPr>
+              <a:t>    </a:t>
+            </a:r>
+            <a:pPr algn="l" indent="0" marL="0">
+              <a:lnSpc>
+                <a:spcPct val="108000"/>
+              </a:lnSpc>
+              <a:buNone/>
+            </a:pPr>
+            <a:r>
+              <a:rPr lang="en-US" sz="900" dirty="0">
+                <a:solidFill>
+                  <a:srgbClr val="569CD6"/>
+                </a:solidFill>
+                <a:latin typeface="Courier New" pitchFamily="34" charset="0"/>
+                <a:ea typeface="Courier New" pitchFamily="34" charset="-122"/>
+                <a:cs typeface="Courier New" pitchFamily="34" charset="-120"/>
+              </a:rPr>
+              <a:t>def</a:t>
+            </a:r>
+            <a:pPr algn="l" indent="0" marL="0">
+              <a:lnSpc>
+                <a:spcPct val="108000"/>
+              </a:lnSpc>
+              <a:buNone/>
+            </a:pPr>
+            <a:r>
+              <a:rPr lang="en-US" sz="900" dirty="0">
+                <a:solidFill>
+                  <a:srgbClr val="D4D4D4"/>
+                </a:solidFill>
+                <a:latin typeface="Courier New" pitchFamily="34" charset="0"/>
+                <a:ea typeface="Courier New" pitchFamily="34" charset="-122"/>
+                <a:cs typeface="Courier New" pitchFamily="34" charset="-120"/>
+              </a:rPr>
+              <a:t> </a:t>
+            </a:r>
+            <a:pPr algn="l" indent="0" marL="0">
+              <a:lnSpc>
+                <a:spcPct val="108000"/>
+              </a:lnSpc>
+              <a:buNone/>
+            </a:pPr>
+            <a:r>
+              <a:rPr lang="en-US" sz="900" dirty="0">
+                <a:solidFill>
+                  <a:srgbClr val="DCDCAA"/>
+                </a:solidFill>
+                <a:latin typeface="Courier New" pitchFamily="34" charset="0"/>
+                <a:ea typeface="Courier New" pitchFamily="34" charset="-122"/>
+                <a:cs typeface="Courier New" pitchFamily="34" charset="-120"/>
+              </a:rPr>
+              <a:t>excel_write_cell</a:t>
+            </a:r>
+            <a:pPr algn="l" indent="0" marL="0">
+              <a:lnSpc>
+                <a:spcPct val="108000"/>
+              </a:lnSpc>
+              <a:buNone/>
+            </a:pPr>
+            <a:r>
+              <a:rPr lang="en-US" sz="900" dirty="0">
+                <a:solidFill>
+                  <a:srgbClr val="D4D4D4"/>
+                </a:solidFill>
+                <a:latin typeface="Courier New" pitchFamily="34" charset="0"/>
+                <a:ea typeface="Courier New" pitchFamily="34" charset="-122"/>
+                <a:cs typeface="Courier New" pitchFamily="34" charset="-120"/>
+              </a:rPr>
+              <a:t>(</a:t>
+            </a:r>
+            <a:pPr algn="l" indent="0" marL="0">
+              <a:lnSpc>
+                <a:spcPct val="108000"/>
+              </a:lnSpc>
+              <a:buNone/>
+            </a:pPr>
+            <a:r>
+              <a:rPr lang="en-US" sz="900" dirty="0">
+                <a:solidFill>
+                  <a:srgbClr val="D4D4D4"/>
+                </a:solidFill>
+                <a:latin typeface="Courier New" pitchFamily="34" charset="0"/>
+                <a:ea typeface="Courier New" pitchFamily="34" charset="-122"/>
+                <a:cs typeface="Courier New" pitchFamily="34" charset="-120"/>
+              </a:rPr>
+              <a:t>address</a:t>
+            </a:r>
+            <a:pPr algn="l" indent="0" marL="0">
+              <a:lnSpc>
+                <a:spcPct val="108000"/>
+              </a:lnSpc>
+              <a:buNone/>
+            </a:pPr>
+            <a:r>
+              <a:rPr lang="en-US" sz="900" dirty="0">
+                <a:solidFill>
+                  <a:srgbClr val="D4D4D4"/>
+                </a:solidFill>
+                <a:latin typeface="Courier New" pitchFamily="34" charset="0"/>
+                <a:ea typeface="Courier New" pitchFamily="34" charset="-122"/>
+                <a:cs typeface="Courier New" pitchFamily="34" charset="-120"/>
+              </a:rPr>
+              <a:t>: </a:t>
+            </a:r>
+            <a:pPr algn="l" indent="0" marL="0">
+              <a:lnSpc>
+                <a:spcPct val="108000"/>
+              </a:lnSpc>
+              <a:buNone/>
+            </a:pPr>
+            <a:r>
+              <a:rPr lang="en-US" sz="900" dirty="0">
+                <a:solidFill>
+                  <a:srgbClr val="D4D4D4"/>
+                </a:solidFill>
+                <a:latin typeface="Courier New" pitchFamily="34" charset="0"/>
+                <a:ea typeface="Courier New" pitchFamily="34" charset="-122"/>
+                <a:cs typeface="Courier New" pitchFamily="34" charset="-120"/>
+              </a:rPr>
+              <a:t>str</a:t>
+            </a:r>
+            <a:pPr algn="l" indent="0" marL="0">
+              <a:lnSpc>
+                <a:spcPct val="108000"/>
+              </a:lnSpc>
+              <a:buNone/>
+            </a:pPr>
+            <a:r>
+              <a:rPr lang="en-US" sz="900" dirty="0">
+                <a:solidFill>
+                  <a:srgbClr val="D4D4D4"/>
+                </a:solidFill>
+                <a:latin typeface="Courier New" pitchFamily="34" charset="0"/>
+                <a:ea typeface="Courier New" pitchFamily="34" charset="-122"/>
+                <a:cs typeface="Courier New" pitchFamily="34" charset="-120"/>
+              </a:rPr>
+              <a:t>, </a:t>
+            </a:r>
+            <a:pPr algn="l" indent="0" marL="0">
+              <a:lnSpc>
+                <a:spcPct val="108000"/>
+              </a:lnSpc>
+              <a:buNone/>
+            </a:pPr>
+            <a:r>
+              <a:rPr lang="en-US" sz="900" dirty="0">
+                <a:solidFill>
+                  <a:srgbClr val="D4D4D4"/>
+                </a:solidFill>
+                <a:latin typeface="Courier New" pitchFamily="34" charset="0"/>
+                <a:ea typeface="Courier New" pitchFamily="34" charset="-122"/>
+                <a:cs typeface="Courier New" pitchFamily="34" charset="-120"/>
+              </a:rPr>
+              <a:t>value</a:t>
+            </a:r>
+            <a:pPr algn="l" indent="0" marL="0">
+              <a:lnSpc>
+                <a:spcPct val="108000"/>
+              </a:lnSpc>
+              <a:buNone/>
+            </a:pPr>
+            <a:r>
+              <a:rPr lang="en-US" sz="900" dirty="0">
+                <a:solidFill>
+                  <a:srgbClr val="D4D4D4"/>
+                </a:solidFill>
+                <a:latin typeface="Courier New" pitchFamily="34" charset="0"/>
+                <a:ea typeface="Courier New" pitchFamily="34" charset="-122"/>
+                <a:cs typeface="Courier New" pitchFamily="34" charset="-120"/>
+              </a:rPr>
+              <a:t>: </a:t>
+            </a:r>
+            <a:pPr algn="l" indent="0" marL="0">
+              <a:lnSpc>
+                <a:spcPct val="108000"/>
+              </a:lnSpc>
+              <a:buNone/>
+            </a:pPr>
+            <a:r>
+              <a:rPr lang="en-US" sz="900" dirty="0">
+                <a:solidFill>
+                  <a:srgbClr val="D4D4D4"/>
+                </a:solidFill>
+                <a:latin typeface="Courier New" pitchFamily="34" charset="0"/>
+                <a:ea typeface="Courier New" pitchFamily="34" charset="-122"/>
+                <a:cs typeface="Courier New" pitchFamily="34" charset="-120"/>
+              </a:rPr>
+              <a:t>str</a:t>
+            </a:r>
+            <a:pPr algn="l" indent="0" marL="0">
+              <a:lnSpc>
+                <a:spcPct val="108000"/>
+              </a:lnSpc>
+              <a:buNone/>
+            </a:pPr>
+            <a:r>
+              <a:rPr lang="en-US" sz="900" dirty="0">
+                <a:solidFill>
+                  <a:srgbClr val="D4D4D4"/>
+                </a:solidFill>
+                <a:latin typeface="Courier New" pitchFamily="34" charset="0"/>
+                <a:ea typeface="Courier New" pitchFamily="34" charset="-122"/>
+                <a:cs typeface="Courier New" pitchFamily="34" charset="-120"/>
+              </a:rPr>
+              <a:t>) -&gt; </a:t>
+            </a:r>
+            <a:pPr algn="l" indent="0" marL="0">
+              <a:lnSpc>
+                <a:spcPct val="108000"/>
+              </a:lnSpc>
+              <a:buNone/>
+            </a:pPr>
+            <a:r>
+              <a:rPr lang="en-US" sz="900" dirty="0">
+                <a:solidFill>
+                  <a:srgbClr val="D4D4D4"/>
+                </a:solidFill>
+                <a:latin typeface="Courier New" pitchFamily="34" charset="0"/>
+                <a:ea typeface="Courier New" pitchFamily="34" charset="-122"/>
+                <a:cs typeface="Courier New" pitchFamily="34" charset="-120"/>
+              </a:rPr>
+              <a:t>str</a:t>
+            </a:r>
+            <a:pPr algn="l" indent="0" marL="0">
+              <a:lnSpc>
+                <a:spcPct val="108000"/>
+              </a:lnSpc>
+              <a:buNone/>
+            </a:pPr>
+            <a:r>
+              <a:rPr lang="en-US" sz="900" dirty="0">
+                <a:solidFill>
+                  <a:srgbClr val="D4D4D4"/>
+                </a:solidFill>
+                <a:latin typeface="Courier New" pitchFamily="34" charset="0"/>
+                <a:ea typeface="Courier New" pitchFamily="34" charset="-122"/>
+                <a:cs typeface="Courier New" pitchFamily="34" charset="-120"/>
+              </a:rPr>
+              <a:t>:</a:t>
+            </a:r>
+            <a:endParaRPr lang="en-US" sz="900" dirty="0"/>
+          </a:p>
+          <a:p>
+            <a:pPr algn="l" indent="0" marL="0">
+              <a:lnSpc>
+                <a:spcPct val="108000"/>
+              </a:lnSpc>
+              <a:buNone/>
+            </a:pPr>
+            <a:r>
+              <a:rPr lang="en-US" sz="900" dirty="0">
+                <a:solidFill>
+                  <a:srgbClr val="D4D4D4"/>
+                </a:solidFill>
+                <a:latin typeface="Courier New" pitchFamily="34" charset="0"/>
+                <a:ea typeface="Courier New" pitchFamily="34" charset="-122"/>
+                <a:cs typeface="Courier New" pitchFamily="34" charset="-120"/>
+              </a:rPr>
               <a:t>        </a:t>
             </a:r>
             <a:pPr algn="l" indent="0" marL="0">
@@ -4149,12 +4720,401 @@
             <a:r>
               <a:rPr lang="en-US" sz="900" dirty="0">
                 <a:solidFill>
+                  <a:srgbClr val="CE9178"/>
+                </a:solidFill>
+                <a:latin typeface="Courier New" pitchFamily="34" charset="0"/>
+                <a:ea typeface="Courier New" pitchFamily="34" charset="-122"/>
+                <a:cs typeface="Courier New" pitchFamily="34" charset="-120"/>
+              </a:rPr>
+              <a:t>""</a:t>
+            </a:r>
+            <a:pPr algn="l" indent="0" marL="0">
+              <a:lnSpc>
+                <a:spcPct val="108000"/>
+              </a:lnSpc>
+              <a:buNone/>
+            </a:pPr>
+            <a:r>
+              <a:rPr lang="en-US" sz="900" dirty="0">
+                <a:solidFill>
+                  <a:srgbClr val="CE9178"/>
+                </a:solidFill>
+                <a:latin typeface="Courier New" pitchFamily="34" charset="0"/>
+                <a:ea typeface="Courier New" pitchFamily="34" charset="-122"/>
+                <a:cs typeface="Courier New" pitchFamily="34" charset="-120"/>
+              </a:rPr>
+              <a:t>"엑셀 시트의 특정 셀(예 'B2')에 값을 기록한다."</a:t>
+            </a:r>
+            <a:pPr algn="l" indent="0" marL="0">
+              <a:lnSpc>
+                <a:spcPct val="108000"/>
+              </a:lnSpc>
+              <a:buNone/>
+            </a:pPr>
+            <a:r>
+              <a:rPr lang="en-US" sz="900" dirty="0">
+                <a:solidFill>
+                  <a:srgbClr val="CE9178"/>
+                </a:solidFill>
+                <a:latin typeface="Courier New" pitchFamily="34" charset="0"/>
+                <a:ea typeface="Courier New" pitchFamily="34" charset="-122"/>
+                <a:cs typeface="Courier New" pitchFamily="34" charset="-120"/>
+              </a:rPr>
+              <a:t>""</a:t>
+            </a:r>
+            <a:endParaRPr lang="en-US" sz="900" dirty="0"/>
+          </a:p>
+          <a:p>
+            <a:pPr algn="l" indent="0" marL="0">
+              <a:lnSpc>
+                <a:spcPct val="108000"/>
+              </a:lnSpc>
+              <a:buNone/>
+            </a:pPr>
+            <a:r>
+              <a:rPr lang="en-US" sz="900" dirty="0">
+                <a:solidFill>
+                  <a:srgbClr val="D4D4D4"/>
+                </a:solidFill>
+                <a:latin typeface="Courier New" pitchFamily="34" charset="0"/>
+                <a:ea typeface="Courier New" pitchFamily="34" charset="-122"/>
+                <a:cs typeface="Courier New" pitchFamily="34" charset="-120"/>
+              </a:rPr>
+              <a:t>        </a:t>
+            </a:r>
+            <a:pPr algn="l" indent="0" marL="0">
+              <a:lnSpc>
+                <a:spcPct val="108000"/>
+              </a:lnSpc>
+              <a:buNone/>
+            </a:pPr>
+            <a:r>
+              <a:rPr lang="en-US" sz="900" dirty="0">
+                <a:solidFill>
+                  <a:srgbClr val="D4D4D4"/>
+                </a:solidFill>
+                <a:latin typeface="Courier New" pitchFamily="34" charset="0"/>
+                <a:ea typeface="Courier New" pitchFamily="34" charset="-122"/>
+                <a:cs typeface="Courier New" pitchFamily="34" charset="-120"/>
+              </a:rPr>
+              <a:t>sheet</a:t>
+            </a:r>
+            <a:pPr algn="l" indent="0" marL="0">
+              <a:lnSpc>
+                <a:spcPct val="108000"/>
+              </a:lnSpc>
+              <a:buNone/>
+            </a:pPr>
+            <a:r>
+              <a:rPr lang="en-US" sz="900" dirty="0">
+                <a:solidFill>
+                  <a:srgbClr val="D4D4D4"/>
+                </a:solidFill>
+                <a:latin typeface="Courier New" pitchFamily="34" charset="0"/>
+                <a:ea typeface="Courier New" pitchFamily="34" charset="-122"/>
+                <a:cs typeface="Courier New" pitchFamily="34" charset="-120"/>
+              </a:rPr>
+              <a:t>.</a:t>
+            </a:r>
+            <a:pPr algn="l" indent="0" marL="0">
+              <a:lnSpc>
+                <a:spcPct val="108000"/>
+              </a:lnSpc>
+              <a:buNone/>
+            </a:pPr>
+            <a:r>
+              <a:rPr lang="en-US" sz="900" dirty="0">
+                <a:solidFill>
+                  <a:srgbClr val="DCDCAA"/>
+                </a:solidFill>
+                <a:latin typeface="Courier New" pitchFamily="34" charset="0"/>
+                <a:ea typeface="Courier New" pitchFamily="34" charset="-122"/>
+                <a:cs typeface="Courier New" pitchFamily="34" charset="-120"/>
+              </a:rPr>
+              <a:t>range</a:t>
+            </a:r>
+            <a:pPr algn="l" indent="0" marL="0">
+              <a:lnSpc>
+                <a:spcPct val="108000"/>
+              </a:lnSpc>
+              <a:buNone/>
+            </a:pPr>
+            <a:r>
+              <a:rPr lang="en-US" sz="900" dirty="0">
+                <a:solidFill>
+                  <a:srgbClr val="D4D4D4"/>
+                </a:solidFill>
+                <a:latin typeface="Courier New" pitchFamily="34" charset="0"/>
+                <a:ea typeface="Courier New" pitchFamily="34" charset="-122"/>
+                <a:cs typeface="Courier New" pitchFamily="34" charset="-120"/>
+              </a:rPr>
+              <a:t>(</a:t>
+            </a:r>
+            <a:pPr algn="l" indent="0" marL="0">
+              <a:lnSpc>
+                <a:spcPct val="108000"/>
+              </a:lnSpc>
+              <a:buNone/>
+            </a:pPr>
+            <a:r>
+              <a:rPr lang="en-US" sz="900" dirty="0">
+                <a:solidFill>
+                  <a:srgbClr val="D4D4D4"/>
+                </a:solidFill>
+                <a:latin typeface="Courier New" pitchFamily="34" charset="0"/>
+                <a:ea typeface="Courier New" pitchFamily="34" charset="-122"/>
+                <a:cs typeface="Courier New" pitchFamily="34" charset="-120"/>
+              </a:rPr>
+              <a:t>address</a:t>
+            </a:r>
+            <a:pPr algn="l" indent="0" marL="0">
+              <a:lnSpc>
+                <a:spcPct val="108000"/>
+              </a:lnSpc>
+              <a:buNone/>
+            </a:pPr>
+            <a:r>
+              <a:rPr lang="en-US" sz="900" dirty="0">
+                <a:solidFill>
+                  <a:srgbClr val="D4D4D4"/>
+                </a:solidFill>
+                <a:latin typeface="Courier New" pitchFamily="34" charset="0"/>
+                <a:ea typeface="Courier New" pitchFamily="34" charset="-122"/>
+                <a:cs typeface="Courier New" pitchFamily="34" charset="-120"/>
+              </a:rPr>
+              <a:t>).</a:t>
+            </a:r>
+            <a:pPr algn="l" indent="0" marL="0">
+              <a:lnSpc>
+                <a:spcPct val="108000"/>
+              </a:lnSpc>
+              <a:buNone/>
+            </a:pPr>
+            <a:r>
+              <a:rPr lang="en-US" sz="900" dirty="0">
+                <a:solidFill>
+                  <a:srgbClr val="D4D4D4"/>
+                </a:solidFill>
+                <a:latin typeface="Courier New" pitchFamily="34" charset="0"/>
+                <a:ea typeface="Courier New" pitchFamily="34" charset="-122"/>
+                <a:cs typeface="Courier New" pitchFamily="34" charset="-120"/>
+              </a:rPr>
+              <a:t>value</a:t>
+            </a:r>
+            <a:pPr algn="l" indent="0" marL="0">
+              <a:lnSpc>
+                <a:spcPct val="108000"/>
+              </a:lnSpc>
+              <a:buNone/>
+            </a:pPr>
+            <a:r>
+              <a:rPr lang="en-US" sz="900" dirty="0">
+                <a:solidFill>
+                  <a:srgbClr val="D4D4D4"/>
+                </a:solidFill>
+                <a:latin typeface="Courier New" pitchFamily="34" charset="0"/>
+                <a:ea typeface="Courier New" pitchFamily="34" charset="-122"/>
+                <a:cs typeface="Courier New" pitchFamily="34" charset="-120"/>
+              </a:rPr>
+              <a:t> = </a:t>
+            </a:r>
+            <a:pPr algn="l" indent="0" marL="0">
+              <a:lnSpc>
+                <a:spcPct val="108000"/>
+              </a:lnSpc>
+              <a:buNone/>
+            </a:pPr>
+            <a:r>
+              <a:rPr lang="en-US" sz="900" dirty="0">
+                <a:solidFill>
+                  <a:srgbClr val="D4D4D4"/>
+                </a:solidFill>
+                <a:latin typeface="Courier New" pitchFamily="34" charset="0"/>
+                <a:ea typeface="Courier New" pitchFamily="34" charset="-122"/>
+                <a:cs typeface="Courier New" pitchFamily="34" charset="-120"/>
+              </a:rPr>
+              <a:t>value</a:t>
+            </a:r>
+            <a:endParaRPr lang="en-US" sz="900" dirty="0"/>
+          </a:p>
+          <a:p>
+            <a:pPr algn="l" indent="0" marL="0">
+              <a:lnSpc>
+                <a:spcPct val="108000"/>
+              </a:lnSpc>
+              <a:buNone/>
+            </a:pPr>
+            <a:r>
+              <a:rPr lang="en-US" sz="900" dirty="0">
+                <a:solidFill>
+                  <a:srgbClr val="D4D4D4"/>
+                </a:solidFill>
+                <a:latin typeface="Courier New" pitchFamily="34" charset="0"/>
+                <a:ea typeface="Courier New" pitchFamily="34" charset="-122"/>
+                <a:cs typeface="Courier New" pitchFamily="34" charset="-120"/>
+              </a:rPr>
+              <a:t>        </a:t>
+            </a:r>
+            <a:pPr algn="l" indent="0" marL="0">
+              <a:lnSpc>
+                <a:spcPct val="108000"/>
+              </a:lnSpc>
+              <a:buNone/>
+            </a:pPr>
+            <a:r>
+              <a:rPr lang="en-US" sz="900" dirty="0">
+                <a:solidFill>
                   <a:srgbClr val="569CD6"/>
                 </a:solidFill>
                 <a:latin typeface="Courier New" pitchFamily="34" charset="0"/>
                 <a:ea typeface="Courier New" pitchFamily="34" charset="-122"/>
                 <a:cs typeface="Courier New" pitchFamily="34" charset="-120"/>
               </a:rPr>
+              <a:t>return</a:t>
+            </a:r>
+            <a:pPr algn="l" indent="0" marL="0">
+              <a:lnSpc>
+                <a:spcPct val="108000"/>
+              </a:lnSpc>
+              <a:buNone/>
+            </a:pPr>
+            <a:r>
+              <a:rPr lang="en-US" sz="900" dirty="0">
+                <a:solidFill>
+                  <a:srgbClr val="D4D4D4"/>
+                </a:solidFill>
+                <a:latin typeface="Courier New" pitchFamily="34" charset="0"/>
+                <a:ea typeface="Courier New" pitchFamily="34" charset="-122"/>
+                <a:cs typeface="Courier New" pitchFamily="34" charset="-120"/>
+              </a:rPr>
+              <a:t> </a:t>
+            </a:r>
+            <a:pPr algn="l" indent="0" marL="0">
+              <a:lnSpc>
+                <a:spcPct val="108000"/>
+              </a:lnSpc>
+              <a:buNone/>
+            </a:pPr>
+            <a:r>
+              <a:rPr lang="en-US" sz="900" dirty="0">
+                <a:solidFill>
+                  <a:srgbClr val="D4D4D4"/>
+                </a:solidFill>
+                <a:latin typeface="Courier New" pitchFamily="34" charset="0"/>
+                <a:ea typeface="Courier New" pitchFamily="34" charset="-122"/>
+                <a:cs typeface="Courier New" pitchFamily="34" charset="-120"/>
+              </a:rPr>
+              <a:t>f</a:t>
+            </a:r>
+            <a:pPr algn="l" indent="0" marL="0">
+              <a:lnSpc>
+                <a:spcPct val="108000"/>
+              </a:lnSpc>
+              <a:buNone/>
+            </a:pPr>
+            <a:r>
+              <a:rPr lang="en-US" sz="900" dirty="0">
+                <a:solidFill>
+                  <a:srgbClr val="CE9178"/>
+                </a:solidFill>
+                <a:latin typeface="Courier New" pitchFamily="34" charset="0"/>
+                <a:ea typeface="Courier New" pitchFamily="34" charset="-122"/>
+                <a:cs typeface="Courier New" pitchFamily="34" charset="-120"/>
+              </a:rPr>
+              <a:t>"{address} 에 '{value}' 를 기록했다."</a:t>
+            </a:r>
+            <a:endParaRPr lang="en-US" sz="900" dirty="0"/>
+          </a:p>
+          <a:p>
+            <a:pPr algn="l" indent="0" marL="0">
+              <a:lnSpc>
+                <a:spcPct val="108000"/>
+              </a:lnSpc>
+              <a:buNone/>
+            </a:pPr>
+            <a:r>
+              <a:rPr lang="en-US" sz="900" dirty="0">
+                <a:solidFill>
+                  <a:srgbClr val="D4D4D4"/>
+                </a:solidFill>
+                <a:latin typeface="Courier New" pitchFamily="34" charset="0"/>
+                <a:ea typeface="Courier New" pitchFamily="34" charset="-122"/>
+                <a:cs typeface="Courier New" pitchFamily="34" charset="-120"/>
+              </a:rPr>
+              <a:t> </a:t>
+            </a:r>
+            <a:endParaRPr lang="en-US" sz="900" dirty="0"/>
+          </a:p>
+          <a:p>
+            <a:pPr algn="l" indent="0" marL="0">
+              <a:lnSpc>
+                <a:spcPct val="108000"/>
+              </a:lnSpc>
+              <a:buNone/>
+            </a:pPr>
+            <a:r>
+              <a:rPr lang="en-US" sz="900" dirty="0">
+                <a:solidFill>
+                  <a:srgbClr val="D4D4D4"/>
+                </a:solidFill>
+                <a:latin typeface="Courier New" pitchFamily="34" charset="0"/>
+                <a:ea typeface="Courier New" pitchFamily="34" charset="-122"/>
+                <a:cs typeface="Courier New" pitchFamily="34" charset="-120"/>
+              </a:rPr>
+              <a:t>    @</a:t>
+            </a:r>
+            <a:pPr algn="l" indent="0" marL="0">
+              <a:lnSpc>
+                <a:spcPct val="108000"/>
+              </a:lnSpc>
+              <a:buNone/>
+            </a:pPr>
+            <a:r>
+              <a:rPr lang="en-US" sz="900" dirty="0">
+                <a:solidFill>
+                  <a:srgbClr val="D4D4D4"/>
+                </a:solidFill>
+                <a:latin typeface="Courier New" pitchFamily="34" charset="0"/>
+                <a:ea typeface="Courier New" pitchFamily="34" charset="-122"/>
+                <a:cs typeface="Courier New" pitchFamily="34" charset="-120"/>
+              </a:rPr>
+              <a:t>tool</a:t>
+            </a:r>
+            <a:endParaRPr lang="en-US" sz="900" dirty="0"/>
+          </a:p>
+          <a:p>
+            <a:pPr algn="l" indent="0" marL="0">
+              <a:lnSpc>
+                <a:spcPct val="108000"/>
+              </a:lnSpc>
+              <a:buNone/>
+            </a:pPr>
+            <a:r>
+              <a:rPr lang="en-US" sz="900" dirty="0">
+                <a:solidFill>
+                  <a:srgbClr val="D4D4D4"/>
+                </a:solidFill>
+                <a:latin typeface="Courier New" pitchFamily="34" charset="0"/>
+                <a:ea typeface="Courier New" pitchFamily="34" charset="-122"/>
+                <a:cs typeface="Courier New" pitchFamily="34" charset="-120"/>
+              </a:rPr>
+              <a:t>    </a:t>
+            </a:r>
+            <a:pPr algn="l" indent="0" marL="0">
+              <a:lnSpc>
+                <a:spcPct val="108000"/>
+              </a:lnSpc>
+              <a:buNone/>
+            </a:pPr>
+            <a:r>
+              <a:rPr lang="en-US" sz="900" dirty="0">
+                <a:solidFill>
+                  <a:srgbClr val="569CD6"/>
+                </a:solidFill>
+                <a:latin typeface="Courier New" pitchFamily="34" charset="0"/>
+                <a:ea typeface="Courier New" pitchFamily="34" charset="-122"/>
+                <a:cs typeface="Courier New" pitchFamily="34" charset="-120"/>
+              </a:rPr>
               <a:t>def</a:t>
             </a:r>
             <a:pPr algn="l" indent="0" marL="0">
@@ -4189,6 +5149,443 @@
                 <a:ea typeface="Courier New" pitchFamily="34" charset="-122"/>
                 <a:cs typeface="Courier New" pitchFamily="34" charset="-120"/>
               </a:rPr>
+              <a:t>excel_read_cell</a:t>
+            </a:r>
+            <a:pPr algn="l" indent="0" marL="0">
+              <a:lnSpc>
+                <a:spcPct val="108000"/>
+              </a:lnSpc>
+              <a:buNone/>
+            </a:pPr>
+            <a:r>
+              <a:rPr lang="en-US" sz="900" dirty="0">
+                <a:solidFill>
+                  <a:srgbClr val="D4D4D4"/>
+                </a:solidFill>
+                <a:latin typeface="Courier New" pitchFamily="34" charset="0"/>
+                <a:ea typeface="Courier New" pitchFamily="34" charset="-122"/>
+                <a:cs typeface="Courier New" pitchFamily="34" charset="-120"/>
+              </a:rPr>
+              <a:t>(</a:t>
+            </a:r>
+            <a:pPr algn="l" indent="0" marL="0">
+              <a:lnSpc>
+                <a:spcPct val="108000"/>
+              </a:lnSpc>
+              <a:buNone/>
+            </a:pPr>
+            <a:r>
+              <a:rPr lang="en-US" sz="900" dirty="0">
+                <a:solidFill>
+                  <a:srgbClr val="D4D4D4"/>
+                </a:solidFill>
+                <a:latin typeface="Courier New" pitchFamily="34" charset="0"/>
+                <a:ea typeface="Courier New" pitchFamily="34" charset="-122"/>
+                <a:cs typeface="Courier New" pitchFamily="34" charset="-120"/>
+              </a:rPr>
+              <a:t>address</a:t>
+            </a:r>
+            <a:pPr algn="l" indent="0" marL="0">
+              <a:lnSpc>
+                <a:spcPct val="108000"/>
+              </a:lnSpc>
+              <a:buNone/>
+            </a:pPr>
+            <a:r>
+              <a:rPr lang="en-US" sz="900" dirty="0">
+                <a:solidFill>
+                  <a:srgbClr val="D4D4D4"/>
+                </a:solidFill>
+                <a:latin typeface="Courier New" pitchFamily="34" charset="0"/>
+                <a:ea typeface="Courier New" pitchFamily="34" charset="-122"/>
+                <a:cs typeface="Courier New" pitchFamily="34" charset="-120"/>
+              </a:rPr>
+              <a:t>: </a:t>
+            </a:r>
+            <a:pPr algn="l" indent="0" marL="0">
+              <a:lnSpc>
+                <a:spcPct val="108000"/>
+              </a:lnSpc>
+              <a:buNone/>
+            </a:pPr>
+            <a:r>
+              <a:rPr lang="en-US" sz="900" dirty="0">
+                <a:solidFill>
+                  <a:srgbClr val="D4D4D4"/>
+                </a:solidFill>
+                <a:latin typeface="Courier New" pitchFamily="34" charset="0"/>
+                <a:ea typeface="Courier New" pitchFamily="34" charset="-122"/>
+                <a:cs typeface="Courier New" pitchFamily="34" charset="-120"/>
+              </a:rPr>
+              <a:t>str</a:t>
+            </a:r>
+            <a:pPr algn="l" indent="0" marL="0">
+              <a:lnSpc>
+                <a:spcPct val="108000"/>
+              </a:lnSpc>
+              <a:buNone/>
+            </a:pPr>
+            <a:r>
+              <a:rPr lang="en-US" sz="900" dirty="0">
+                <a:solidFill>
+                  <a:srgbClr val="D4D4D4"/>
+                </a:solidFill>
+                <a:latin typeface="Courier New" pitchFamily="34" charset="0"/>
+                <a:ea typeface="Courier New" pitchFamily="34" charset="-122"/>
+                <a:cs typeface="Courier New" pitchFamily="34" charset="-120"/>
+              </a:rPr>
+              <a:t>) -&gt; </a:t>
+            </a:r>
+            <a:pPr algn="l" indent="0" marL="0">
+              <a:lnSpc>
+                <a:spcPct val="108000"/>
+              </a:lnSpc>
+              <a:buNone/>
+            </a:pPr>
+            <a:r>
+              <a:rPr lang="en-US" sz="900" dirty="0">
+                <a:solidFill>
+                  <a:srgbClr val="D4D4D4"/>
+                </a:solidFill>
+                <a:latin typeface="Courier New" pitchFamily="34" charset="0"/>
+                <a:ea typeface="Courier New" pitchFamily="34" charset="-122"/>
+                <a:cs typeface="Courier New" pitchFamily="34" charset="-120"/>
+              </a:rPr>
+              <a:t>str</a:t>
+            </a:r>
+            <a:pPr algn="l" indent="0" marL="0">
+              <a:lnSpc>
+                <a:spcPct val="108000"/>
+              </a:lnSpc>
+              <a:buNone/>
+            </a:pPr>
+            <a:r>
+              <a:rPr lang="en-US" sz="900" dirty="0">
+                <a:solidFill>
+                  <a:srgbClr val="D4D4D4"/>
+                </a:solidFill>
+                <a:latin typeface="Courier New" pitchFamily="34" charset="0"/>
+                <a:ea typeface="Courier New" pitchFamily="34" charset="-122"/>
+                <a:cs typeface="Courier New" pitchFamily="34" charset="-120"/>
+              </a:rPr>
+              <a:t>:</a:t>
+            </a:r>
+            <a:endParaRPr lang="en-US" sz="900" dirty="0"/>
+          </a:p>
+          <a:p>
+            <a:pPr algn="l" indent="0" marL="0">
+              <a:lnSpc>
+                <a:spcPct val="108000"/>
+              </a:lnSpc>
+              <a:buNone/>
+            </a:pPr>
+            <a:r>
+              <a:rPr lang="en-US" sz="900" dirty="0">
+                <a:solidFill>
+                  <a:srgbClr val="D4D4D4"/>
+                </a:solidFill>
+                <a:latin typeface="Courier New" pitchFamily="34" charset="0"/>
+                <a:ea typeface="Courier New" pitchFamily="34" charset="-122"/>
+                <a:cs typeface="Courier New" pitchFamily="34" charset="-120"/>
+              </a:rPr>
+              <a:t>        </a:t>
+            </a:r>
+            <a:pPr algn="l" indent="0" marL="0">
+              <a:lnSpc>
+                <a:spcPct val="108000"/>
+              </a:lnSpc>
+              <a:buNone/>
+            </a:pPr>
+            <a:r>
+              <a:rPr lang="en-US" sz="900" dirty="0">
+                <a:solidFill>
+                  <a:srgbClr val="CE9178"/>
+                </a:solidFill>
+                <a:latin typeface="Courier New" pitchFamily="34" charset="0"/>
+                <a:ea typeface="Courier New" pitchFamily="34" charset="-122"/>
+                <a:cs typeface="Courier New" pitchFamily="34" charset="-120"/>
+              </a:rPr>
+              <a:t>""</a:t>
+            </a:r>
+            <a:pPr algn="l" indent="0" marL="0">
+              <a:lnSpc>
+                <a:spcPct val="108000"/>
+              </a:lnSpc>
+              <a:buNone/>
+            </a:pPr>
+            <a:r>
+              <a:rPr lang="en-US" sz="900" dirty="0">
+                <a:solidFill>
+                  <a:srgbClr val="CE9178"/>
+                </a:solidFill>
+                <a:latin typeface="Courier New" pitchFamily="34" charset="0"/>
+                <a:ea typeface="Courier New" pitchFamily="34" charset="-122"/>
+                <a:cs typeface="Courier New" pitchFamily="34" charset="-120"/>
+              </a:rPr>
+              <a:t>"엑셀 시트의 특정 셀(예 'B2') 값을 읽어 돌려준다."</a:t>
+            </a:r>
+            <a:pPr algn="l" indent="0" marL="0">
+              <a:lnSpc>
+                <a:spcPct val="108000"/>
+              </a:lnSpc>
+              <a:buNone/>
+            </a:pPr>
+            <a:r>
+              <a:rPr lang="en-US" sz="900" dirty="0">
+                <a:solidFill>
+                  <a:srgbClr val="CE9178"/>
+                </a:solidFill>
+                <a:latin typeface="Courier New" pitchFamily="34" charset="0"/>
+                <a:ea typeface="Courier New" pitchFamily="34" charset="-122"/>
+                <a:cs typeface="Courier New" pitchFamily="34" charset="-120"/>
+              </a:rPr>
+              <a:t>""</a:t>
+            </a:r>
+            <a:endParaRPr lang="en-US" sz="900" dirty="0"/>
+          </a:p>
+          <a:p>
+            <a:pPr algn="l" indent="0" marL="0">
+              <a:lnSpc>
+                <a:spcPct val="108000"/>
+              </a:lnSpc>
+              <a:buNone/>
+            </a:pPr>
+            <a:r>
+              <a:rPr lang="en-US" sz="900" dirty="0">
+                <a:solidFill>
+                  <a:srgbClr val="D4D4D4"/>
+                </a:solidFill>
+                <a:latin typeface="Courier New" pitchFamily="34" charset="0"/>
+                <a:ea typeface="Courier New" pitchFamily="34" charset="-122"/>
+                <a:cs typeface="Courier New" pitchFamily="34" charset="-120"/>
+              </a:rPr>
+              <a:t>        </a:t>
+            </a:r>
+            <a:pPr algn="l" indent="0" marL="0">
+              <a:lnSpc>
+                <a:spcPct val="108000"/>
+              </a:lnSpc>
+              <a:buNone/>
+            </a:pPr>
+            <a:r>
+              <a:rPr lang="en-US" sz="900" dirty="0">
+                <a:solidFill>
+                  <a:srgbClr val="569CD6"/>
+                </a:solidFill>
+                <a:latin typeface="Courier New" pitchFamily="34" charset="0"/>
+                <a:ea typeface="Courier New" pitchFamily="34" charset="-122"/>
+                <a:cs typeface="Courier New" pitchFamily="34" charset="-120"/>
+              </a:rPr>
+              <a:t>return</a:t>
+            </a:r>
+            <a:pPr algn="l" indent="0" marL="0">
+              <a:lnSpc>
+                <a:spcPct val="108000"/>
+              </a:lnSpc>
+              <a:buNone/>
+            </a:pPr>
+            <a:r>
+              <a:rPr lang="en-US" sz="900" dirty="0">
+                <a:solidFill>
+                  <a:srgbClr val="D4D4D4"/>
+                </a:solidFill>
+                <a:latin typeface="Courier New" pitchFamily="34" charset="0"/>
+                <a:ea typeface="Courier New" pitchFamily="34" charset="-122"/>
+                <a:cs typeface="Courier New" pitchFamily="34" charset="-120"/>
+              </a:rPr>
+              <a:t> </a:t>
+            </a:r>
+            <a:pPr algn="l" indent="0" marL="0">
+              <a:lnSpc>
+                <a:spcPct val="108000"/>
+              </a:lnSpc>
+              <a:buNone/>
+            </a:pPr>
+            <a:r>
+              <a:rPr lang="en-US" sz="900" dirty="0">
+                <a:solidFill>
+                  <a:srgbClr val="D4D4D4"/>
+                </a:solidFill>
+                <a:latin typeface="Courier New" pitchFamily="34" charset="0"/>
+                <a:ea typeface="Courier New" pitchFamily="34" charset="-122"/>
+                <a:cs typeface="Courier New" pitchFamily="34" charset="-120"/>
+              </a:rPr>
+              <a:t>f</a:t>
+            </a:r>
+            <a:pPr algn="l" indent="0" marL="0">
+              <a:lnSpc>
+                <a:spcPct val="108000"/>
+              </a:lnSpc>
+              <a:buNone/>
+            </a:pPr>
+            <a:r>
+              <a:rPr lang="en-US" sz="900" dirty="0">
+                <a:solidFill>
+                  <a:srgbClr val="CE9178"/>
+                </a:solidFill>
+                <a:latin typeface="Courier New" pitchFamily="34" charset="0"/>
+                <a:ea typeface="Courier New" pitchFamily="34" charset="-122"/>
+                <a:cs typeface="Courier New" pitchFamily="34" charset="-120"/>
+              </a:rPr>
+              <a:t>"{address} = {sheet.range(address).value}"</a:t>
+            </a:r>
+            <a:endParaRPr lang="en-US" sz="900" dirty="0"/>
+          </a:p>
+          <a:p>
+            <a:pPr algn="l" indent="0" marL="0">
+              <a:lnSpc>
+                <a:spcPct val="108000"/>
+              </a:lnSpc>
+              <a:buNone/>
+            </a:pPr>
+            <a:r>
+              <a:rPr lang="en-US" sz="900" dirty="0">
+                <a:solidFill>
+                  <a:srgbClr val="D4D4D4"/>
+                </a:solidFill>
+                <a:latin typeface="Courier New" pitchFamily="34" charset="0"/>
+                <a:ea typeface="Courier New" pitchFamily="34" charset="-122"/>
+                <a:cs typeface="Courier New" pitchFamily="34" charset="-120"/>
+              </a:rPr>
+              <a:t> </a:t>
+            </a:r>
+            <a:endParaRPr lang="en-US" sz="900" dirty="0"/>
+          </a:p>
+          <a:p>
+            <a:pPr algn="l" indent="0" marL="0">
+              <a:lnSpc>
+                <a:spcPct val="108000"/>
+              </a:lnSpc>
+              <a:buNone/>
+            </a:pPr>
+            <a:r>
+              <a:rPr lang="en-US" sz="900" dirty="0">
+                <a:solidFill>
+                  <a:srgbClr val="D4D4D4"/>
+                </a:solidFill>
+                <a:latin typeface="Courier New" pitchFamily="34" charset="0"/>
+                <a:ea typeface="Courier New" pitchFamily="34" charset="-122"/>
+                <a:cs typeface="Courier New" pitchFamily="34" charset="-120"/>
+              </a:rPr>
+              <a:t>    </a:t>
+            </a:r>
+            <a:pPr algn="l" indent="0" marL="0">
+              <a:lnSpc>
+                <a:spcPct val="108000"/>
+              </a:lnSpc>
+              <a:buNone/>
+            </a:pPr>
+            <a:r>
+              <a:rPr lang="en-US" sz="900" dirty="0">
+                <a:solidFill>
+                  <a:srgbClr val="D4D4D4"/>
+                </a:solidFill>
+                <a:latin typeface="Courier New" pitchFamily="34" charset="0"/>
+                <a:ea typeface="Courier New" pitchFamily="34" charset="-122"/>
+                <a:cs typeface="Courier New" pitchFamily="34" charset="-120"/>
+              </a:rPr>
+              <a:t>agent</a:t>
+            </a:r>
+            <a:pPr algn="l" indent="0" marL="0">
+              <a:lnSpc>
+                <a:spcPct val="108000"/>
+              </a:lnSpc>
+              <a:buNone/>
+            </a:pPr>
+            <a:r>
+              <a:rPr lang="en-US" sz="900" dirty="0">
+                <a:solidFill>
+                  <a:srgbClr val="D4D4D4"/>
+                </a:solidFill>
+                <a:latin typeface="Courier New" pitchFamily="34" charset="0"/>
+                <a:ea typeface="Courier New" pitchFamily="34" charset="-122"/>
+                <a:cs typeface="Courier New" pitchFamily="34" charset="-120"/>
+              </a:rPr>
+              <a:t> = </a:t>
+            </a:r>
+            <a:pPr algn="l" indent="0" marL="0">
+              <a:lnSpc>
+                <a:spcPct val="108000"/>
+              </a:lnSpc>
+              <a:buNone/>
+            </a:pPr>
+            <a:r>
+              <a:rPr lang="en-US" sz="900" dirty="0">
+                <a:solidFill>
+                  <a:srgbClr val="DCDCAA"/>
+                </a:solidFill>
+                <a:latin typeface="Courier New" pitchFamily="34" charset="0"/>
+                <a:ea typeface="Courier New" pitchFamily="34" charset="-122"/>
+                <a:cs typeface="Courier New" pitchFamily="34" charset="-120"/>
+              </a:rPr>
+              <a:t>create_react_agent</a:t>
+            </a:r>
+            <a:pPr algn="l" indent="0" marL="0">
+              <a:lnSpc>
+                <a:spcPct val="108000"/>
+              </a:lnSpc>
+              <a:buNone/>
+            </a:pPr>
+            <a:r>
+              <a:rPr lang="en-US" sz="900" dirty="0">
+                <a:solidFill>
+                  <a:srgbClr val="D4D4D4"/>
+                </a:solidFill>
+                <a:latin typeface="Courier New" pitchFamily="34" charset="0"/>
+                <a:ea typeface="Courier New" pitchFamily="34" charset="-122"/>
+                <a:cs typeface="Courier New" pitchFamily="34" charset="-120"/>
+              </a:rPr>
+              <a:t>(</a:t>
+            </a:r>
+            <a:pPr algn="l" indent="0" marL="0">
+              <a:lnSpc>
+                <a:spcPct val="108000"/>
+              </a:lnSpc>
+              <a:buNone/>
+            </a:pPr>
+            <a:r>
+              <a:rPr lang="en-US" sz="900" dirty="0">
+                <a:solidFill>
+                  <a:srgbClr val="D4D4D4"/>
+                </a:solidFill>
+                <a:latin typeface="Courier New" pitchFamily="34" charset="0"/>
+                <a:ea typeface="Courier New" pitchFamily="34" charset="-122"/>
+                <a:cs typeface="Courier New" pitchFamily="34" charset="-120"/>
+              </a:rPr>
+              <a:t>model</a:t>
+            </a:r>
+            <a:pPr algn="l" indent="0" marL="0">
+              <a:lnSpc>
+                <a:spcPct val="108000"/>
+              </a:lnSpc>
+              <a:buNone/>
+            </a:pPr>
+            <a:r>
+              <a:rPr lang="en-US" sz="900" dirty="0">
+                <a:solidFill>
+                  <a:srgbClr val="D4D4D4"/>
+                </a:solidFill>
+                <a:latin typeface="Courier New" pitchFamily="34" charset="0"/>
+                <a:ea typeface="Courier New" pitchFamily="34" charset="-122"/>
+                <a:cs typeface="Courier New" pitchFamily="34" charset="-120"/>
+              </a:rPr>
+              <a:t>, [</a:t>
+            </a:r>
+            <a:pPr algn="l" indent="0" marL="0">
+              <a:lnSpc>
+                <a:spcPct val="108000"/>
+              </a:lnSpc>
+              <a:buNone/>
+            </a:pPr>
+            <a:r>
+              <a:rPr lang="en-US" sz="900" dirty="0">
+                <a:solidFill>
+                  <a:srgbClr val="D4D4D4"/>
+                </a:solidFill>
+                <a:latin typeface="Courier New" pitchFamily="34" charset="0"/>
+                <a:ea typeface="Courier New" pitchFamily="34" charset="-122"/>
+                <a:cs typeface="Courier New" pitchFamily="34" charset="-120"/>
+              </a:rPr>
               <a:t>excel_write_cell</a:t>
             </a:r>
             <a:pPr algn="l" indent="0" marL="0">
@@ -4206,74 +5603,6 @@
                 <a:ea typeface="Courier New" pitchFamily="34" charset="-122"/>
                 <a:cs typeface="Courier New" pitchFamily="34" charset="-120"/>
               </a:rPr>
-              <a:t>(</a:t>
-            </a:r>
-            <a:pPr algn="l" indent="0" marL="0">
-              <a:lnSpc>
-                <a:spcPct val="108000"/>
-              </a:lnSpc>
-              <a:buNone/>
-            </a:pPr>
-            <a:r>
-              <a:rPr lang="en-US" sz="900" dirty="0">
-                <a:solidFill>
-                  <a:srgbClr val="D4D4D4"/>
-                </a:solidFill>
-                <a:latin typeface="Courier New" pitchFamily="34" charset="0"/>
-                <a:ea typeface="Courier New" pitchFamily="34" charset="-122"/>
-                <a:cs typeface="Courier New" pitchFamily="34" charset="-120"/>
-              </a:rPr>
-              <a:t>address</a:t>
-            </a:r>
-            <a:pPr algn="l" indent="0" marL="0">
-              <a:lnSpc>
-                <a:spcPct val="108000"/>
-              </a:lnSpc>
-              <a:buNone/>
-            </a:pPr>
-            <a:r>
-              <a:rPr lang="en-US" sz="900" dirty="0">
-                <a:solidFill>
-                  <a:srgbClr val="D4D4D4"/>
-                </a:solidFill>
-                <a:latin typeface="Courier New" pitchFamily="34" charset="0"/>
-                <a:ea typeface="Courier New" pitchFamily="34" charset="-122"/>
-                <a:cs typeface="Courier New" pitchFamily="34" charset="-120"/>
-              </a:rPr>
-              <a:t>: </a:t>
-            </a:r>
-            <a:pPr algn="l" indent="0" marL="0">
-              <a:lnSpc>
-                <a:spcPct val="108000"/>
-              </a:lnSpc>
-              <a:buNone/>
-            </a:pPr>
-            <a:r>
-              <a:rPr lang="en-US" sz="900" dirty="0">
-                <a:solidFill>
-                  <a:srgbClr val="D4D4D4"/>
-                </a:solidFill>
-                <a:latin typeface="Courier New" pitchFamily="34" charset="0"/>
-                <a:ea typeface="Courier New" pitchFamily="34" charset="-122"/>
-                <a:cs typeface="Courier New" pitchFamily="34" charset="-120"/>
-              </a:rPr>
-              <a:t>str</a:t>
-            </a:r>
-            <a:pPr algn="l" indent="0" marL="0">
-              <a:lnSpc>
-                <a:spcPct val="108000"/>
-              </a:lnSpc>
-              <a:buNone/>
-            </a:pPr>
-            <a:r>
-              <a:rPr lang="en-US" sz="900" dirty="0">
-                <a:solidFill>
-                  <a:srgbClr val="D4D4D4"/>
-                </a:solidFill>
-                <a:latin typeface="Courier New" pitchFamily="34" charset="0"/>
-                <a:ea typeface="Courier New" pitchFamily="34" charset="-122"/>
-                <a:cs typeface="Courier New" pitchFamily="34" charset="-120"/>
-              </a:rPr>
               <a:t>, </a:t>
             </a:r>
             <a:pPr algn="l" indent="0" marL="0">
@@ -4291,92 +5620,24 @@
                 <a:ea typeface="Courier New" pitchFamily="34" charset="-122"/>
                 <a:cs typeface="Courier New" pitchFamily="34" charset="-120"/>
               </a:rPr>
-              <a:t>value</a:t>
-            </a:r>
-            <a:pPr algn="l" indent="0" marL="0">
-              <a:lnSpc>
-                <a:spcPct val="108000"/>
-              </a:lnSpc>
-              <a:buNone/>
-            </a:pPr>
-            <a:r>
-              <a:rPr lang="en-US" sz="900" dirty="0">
-                <a:solidFill>
-                  <a:srgbClr val="D4D4D4"/>
-                </a:solidFill>
-                <a:latin typeface="Courier New" pitchFamily="34" charset="0"/>
-                <a:ea typeface="Courier New" pitchFamily="34" charset="-122"/>
-                <a:cs typeface="Courier New" pitchFamily="34" charset="-120"/>
-              </a:rPr>
-              <a:t>: </a:t>
-            </a:r>
-            <a:pPr algn="l" indent="0" marL="0">
-              <a:lnSpc>
-                <a:spcPct val="108000"/>
-              </a:lnSpc>
-              <a:buNone/>
-            </a:pPr>
-            <a:r>
-              <a:rPr lang="en-US" sz="900" dirty="0">
-                <a:solidFill>
-                  <a:srgbClr val="D4D4D4"/>
-                </a:solidFill>
-                <a:latin typeface="Courier New" pitchFamily="34" charset="0"/>
-                <a:ea typeface="Courier New" pitchFamily="34" charset="-122"/>
-                <a:cs typeface="Courier New" pitchFamily="34" charset="-120"/>
-              </a:rPr>
-              <a:t>str</a:t>
-            </a:r>
-            <a:pPr algn="l" indent="0" marL="0">
-              <a:lnSpc>
-                <a:spcPct val="108000"/>
-              </a:lnSpc>
-              <a:buNone/>
-            </a:pPr>
-            <a:r>
-              <a:rPr lang="en-US" sz="900" dirty="0">
-                <a:solidFill>
-                  <a:srgbClr val="D4D4D4"/>
-                </a:solidFill>
-                <a:latin typeface="Courier New" pitchFamily="34" charset="0"/>
-                <a:ea typeface="Courier New" pitchFamily="34" charset="-122"/>
-                <a:cs typeface="Courier New" pitchFamily="34" charset="-120"/>
-              </a:rPr>
-              <a:t>) -&gt; </a:t>
-            </a:r>
-            <a:pPr algn="l" indent="0" marL="0">
-              <a:lnSpc>
-                <a:spcPct val="108000"/>
-              </a:lnSpc>
-              <a:buNone/>
-            </a:pPr>
-            <a:r>
-              <a:rPr lang="en-US" sz="900" dirty="0">
-                <a:solidFill>
-                  <a:srgbClr val="D4D4D4"/>
-                </a:solidFill>
-                <a:latin typeface="Courier New" pitchFamily="34" charset="0"/>
-                <a:ea typeface="Courier New" pitchFamily="34" charset="-122"/>
-                <a:cs typeface="Courier New" pitchFamily="34" charset="-120"/>
-              </a:rPr>
-              <a:t>str</a:t>
-            </a:r>
-            <a:pPr algn="l" indent="0" marL="0">
-              <a:lnSpc>
-                <a:spcPct val="108000"/>
-              </a:lnSpc>
-              <a:buNone/>
-            </a:pPr>
-            <a:r>
-              <a:rPr lang="en-US" sz="900" dirty="0">
-                <a:solidFill>
-                  <a:srgbClr val="D4D4D4"/>
-                </a:solidFill>
-                <a:latin typeface="Courier New" pitchFamily="34" charset="0"/>
-                <a:ea typeface="Courier New" pitchFamily="34" charset="-122"/>
-                <a:cs typeface="Courier New" pitchFamily="34" charset="-120"/>
-              </a:rPr>
-              <a:t>:</a:t>
+              <a:t>excel_read_cell</a:t>
+            </a:r>
+            <a:pPr algn="l" indent="0" marL="0">
+              <a:lnSpc>
+                <a:spcPct val="108000"/>
+              </a:lnSpc>
+              <a:buNone/>
+            </a:pPr>
+            <a:r>
+              <a:rPr lang="en-US" sz="900" dirty="0">
+                <a:solidFill>
+                  <a:srgbClr val="D4D4D4"/>
+                </a:solidFill>
+                <a:latin typeface="Courier New" pitchFamily="34" charset="0"/>
+                <a:ea typeface="Courier New" pitchFamily="34" charset="-122"/>
+                <a:cs typeface="Courier New" pitchFamily="34" charset="-120"/>
+              </a:rPr>
+              <a:t>])</a:t>
             </a:r>
             <a:endParaRPr lang="en-US" sz="900" dirty="0"/>
           </a:p>
@@ -4396,7 +5657,41 @@
                 <a:ea typeface="Courier New" pitchFamily="34" charset="-122"/>
                 <a:cs typeface="Courier New" pitchFamily="34" charset="-120"/>
               </a:rPr>
-              <a:t>            </a:t>
+              <a:t>    </a:t>
+            </a:r>
+            <a:pPr algn="l" indent="0" marL="0">
+              <a:lnSpc>
+                <a:spcPct val="108000"/>
+              </a:lnSpc>
+              <a:buNone/>
+            </a:pPr>
+            <a:r>
+              <a:rPr lang="en-US" sz="900" dirty="0">
+                <a:solidFill>
+                  <a:srgbClr val="D4D4D4"/>
+                </a:solidFill>
+                <a:latin typeface="Courier New" pitchFamily="34" charset="0"/>
+                <a:ea typeface="Courier New" pitchFamily="34" charset="-122"/>
+                <a:cs typeface="Courier New" pitchFamily="34" charset="-120"/>
+              </a:rPr>
+              <a:t>token</a:t>
+            </a:r>
+            <a:pPr algn="l" indent="0" marL="0">
+              <a:lnSpc>
+                <a:spcPct val="108000"/>
+              </a:lnSpc>
+              <a:buNone/>
+            </a:pPr>
+            <a:r>
+              <a:rPr lang="en-US" sz="900" dirty="0">
+                <a:solidFill>
+                  <a:srgbClr val="D4D4D4"/>
+                </a:solidFill>
+                <a:latin typeface="Courier New" pitchFamily="34" charset="0"/>
+                <a:ea typeface="Courier New" pitchFamily="34" charset="-122"/>
+                <a:cs typeface="Courier New" pitchFamily="34" charset="-120"/>
+              </a:rPr>
+              <a:t> = </a:t>
             </a:r>
             <a:pPr algn="l" indent="0" marL="0">
               <a:lnSpc>
@@ -4413,7 +5708,98 @@
                 <a:ea typeface="Courier New" pitchFamily="34" charset="-122"/>
                 <a:cs typeface="Courier New" pitchFamily="34" charset="-120"/>
               </a:rPr>
-              <a:t>""</a:t>
+              <a:t>"엑셀툴검증OK"</a:t>
+            </a:r>
+            <a:endParaRPr lang="en-US" sz="900" dirty="0"/>
+          </a:p>
+          <a:p>
+            <a:pPr algn="l" indent="0" marL="0">
+              <a:lnSpc>
+                <a:spcPct val="108000"/>
+              </a:lnSpc>
+              <a:buNone/>
+            </a:pPr>
+            <a:r>
+              <a:rPr lang="en-US" sz="900" dirty="0">
+                <a:solidFill>
+                  <a:srgbClr val="D4D4D4"/>
+                </a:solidFill>
+                <a:latin typeface="Courier New" pitchFamily="34" charset="0"/>
+                <a:ea typeface="Courier New" pitchFamily="34" charset="-122"/>
+                <a:cs typeface="Courier New" pitchFamily="34" charset="-120"/>
+              </a:rPr>
+              <a:t>    </a:t>
+            </a:r>
+            <a:pPr algn="l" indent="0" marL="0">
+              <a:lnSpc>
+                <a:spcPct val="108000"/>
+              </a:lnSpc>
+              <a:buNone/>
+            </a:pPr>
+            <a:r>
+              <a:rPr lang="en-US" sz="900" dirty="0">
+                <a:solidFill>
+                  <a:srgbClr val="D4D4D4"/>
+                </a:solidFill>
+                <a:latin typeface="Courier New" pitchFamily="34" charset="0"/>
+                <a:ea typeface="Courier New" pitchFamily="34" charset="-122"/>
+                <a:cs typeface="Courier New" pitchFamily="34" charset="-120"/>
+              </a:rPr>
+              <a:t>prompt</a:t>
+            </a:r>
+            <a:pPr algn="l" indent="0" marL="0">
+              <a:lnSpc>
+                <a:spcPct val="108000"/>
+              </a:lnSpc>
+              <a:buNone/>
+            </a:pPr>
+            <a:r>
+              <a:rPr lang="en-US" sz="900" dirty="0">
+                <a:solidFill>
+                  <a:srgbClr val="D4D4D4"/>
+                </a:solidFill>
+                <a:latin typeface="Courier New" pitchFamily="34" charset="0"/>
+                <a:ea typeface="Courier New" pitchFamily="34" charset="-122"/>
+                <a:cs typeface="Courier New" pitchFamily="34" charset="-120"/>
+              </a:rPr>
+              <a:t> = (</a:t>
+            </a:r>
+            <a:endParaRPr lang="en-US" sz="900" dirty="0"/>
+          </a:p>
+          <a:p>
+            <a:pPr algn="l" indent="0" marL="0">
+              <a:lnSpc>
+                <a:spcPct val="108000"/>
+              </a:lnSpc>
+              <a:buNone/>
+            </a:pPr>
+            <a:r>
+              <a:rPr lang="en-US" sz="900" dirty="0">
+                <a:solidFill>
+                  <a:srgbClr val="D4D4D4"/>
+                </a:solidFill>
+                <a:latin typeface="Courier New" pitchFamily="34" charset="0"/>
+                <a:ea typeface="Courier New" pitchFamily="34" charset="-122"/>
+                <a:cs typeface="Courier New" pitchFamily="34" charset="-120"/>
+              </a:rPr>
+              <a:t>        </a:t>
+            </a:r>
+            <a:pPr algn="l" indent="0" marL="0">
+              <a:lnSpc>
+                <a:spcPct val="108000"/>
+              </a:lnSpc>
+              <a:buNone/>
+            </a:pPr>
+            <a:r>
+              <a:rPr lang="en-US" sz="900" dirty="0">
+                <a:solidFill>
+                  <a:srgbClr val="D4D4D4"/>
+                </a:solidFill>
+                <a:latin typeface="Courier New" pitchFamily="34" charset="0"/>
+                <a:ea typeface="Courier New" pitchFamily="34" charset="-122"/>
+                <a:cs typeface="Courier New" pitchFamily="34" charset="-120"/>
+              </a:rPr>
+              <a:t>f</a:t>
             </a:r>
             <a:pPr algn="l" indent="0" marL="0">
               <a:lnSpc>
@@ -4430,7 +5816,27 @@
                 <a:ea typeface="Courier New" pitchFamily="34" charset="-122"/>
                 <a:cs typeface="Courier New" pitchFamily="34" charset="-120"/>
               </a:rPr>
-              <a:t>"엑셀 시트의 특정 셀(예 'B2')에 값을 기록한다."</a:t>
+              <a:t>"먼저 excel_write_cell 로 셀 B2 에 '{token}' 를 기록해라. "</a:t>
+            </a:r>
+            <a:endParaRPr lang="en-US" sz="900" dirty="0"/>
+          </a:p>
+          <a:p>
+            <a:pPr algn="l" indent="0" marL="0">
+              <a:lnSpc>
+                <a:spcPct val="108000"/>
+              </a:lnSpc>
+              <a:buNone/>
+            </a:pPr>
+            <a:r>
+              <a:rPr lang="en-US" sz="900" dirty="0">
+                <a:solidFill>
+                  <a:srgbClr val="D4D4D4"/>
+                </a:solidFill>
+                <a:latin typeface="Courier New" pitchFamily="34" charset="0"/>
+                <a:ea typeface="Courier New" pitchFamily="34" charset="-122"/>
+                <a:cs typeface="Courier New" pitchFamily="34" charset="-120"/>
+              </a:rPr>
+              <a:t>        </a:t>
             </a:r>
             <a:pPr algn="l" indent="0" marL="0">
               <a:lnSpc>
@@ -4447,7 +5853,7 @@
                 <a:ea typeface="Courier New" pitchFamily="34" charset="-122"/>
                 <a:cs typeface="Courier New" pitchFamily="34" charset="-120"/>
               </a:rPr>
-              <a:t>""</a:t>
+              <a:t>"그다음 excel_read_cell 로 B2 를 읽어 그 값을 그대로 알려줘. "</a:t>
             </a:r>
             <a:endParaRPr lang="en-US" sz="900" dirty="0"/>
           </a:p>
@@ -4467,160 +5873,24 @@
                 <a:ea typeface="Courier New" pitchFamily="34" charset="-122"/>
                 <a:cs typeface="Courier New" pitchFamily="34" charset="-120"/>
               </a:rPr>
-              <a:t>            </a:t>
-            </a:r>
-            <a:pPr algn="l" indent="0" marL="0">
-              <a:lnSpc>
-                <a:spcPct val="108000"/>
-              </a:lnSpc>
-              <a:buNone/>
-            </a:pPr>
-            <a:r>
-              <a:rPr lang="en-US" sz="900" dirty="0">
-                <a:solidFill>
-                  <a:srgbClr val="D4D4D4"/>
-                </a:solidFill>
-                <a:latin typeface="Courier New" pitchFamily="34" charset="0"/>
-                <a:ea typeface="Courier New" pitchFamily="34" charset="-122"/>
-                <a:cs typeface="Courier New" pitchFamily="34" charset="-120"/>
-              </a:rPr>
-              <a:t>sheet</a:t>
-            </a:r>
-            <a:pPr algn="l" indent="0" marL="0">
-              <a:lnSpc>
-                <a:spcPct val="108000"/>
-              </a:lnSpc>
-              <a:buNone/>
-            </a:pPr>
-            <a:r>
-              <a:rPr lang="en-US" sz="900" dirty="0">
-                <a:solidFill>
-                  <a:srgbClr val="D4D4D4"/>
-                </a:solidFill>
-                <a:latin typeface="Courier New" pitchFamily="34" charset="0"/>
-                <a:ea typeface="Courier New" pitchFamily="34" charset="-122"/>
-                <a:cs typeface="Courier New" pitchFamily="34" charset="-120"/>
-              </a:rPr>
-              <a:t>.</a:t>
-            </a:r>
-            <a:pPr algn="l" indent="0" marL="0">
-              <a:lnSpc>
-                <a:spcPct val="108000"/>
-              </a:lnSpc>
-              <a:buNone/>
-            </a:pPr>
-            <a:r>
-              <a:rPr lang="en-US" sz="900" dirty="0">
-                <a:solidFill>
-                  <a:srgbClr val="DCDCAA"/>
-                </a:solidFill>
-                <a:latin typeface="Courier New" pitchFamily="34" charset="0"/>
-                <a:ea typeface="Courier New" pitchFamily="34" charset="-122"/>
-                <a:cs typeface="Courier New" pitchFamily="34" charset="-120"/>
-              </a:rPr>
-              <a:t>range</a:t>
-            </a:r>
-            <a:pPr algn="l" indent="0" marL="0">
-              <a:lnSpc>
-                <a:spcPct val="108000"/>
-              </a:lnSpc>
-              <a:buNone/>
-            </a:pPr>
-            <a:r>
-              <a:rPr lang="en-US" sz="900" dirty="0">
-                <a:solidFill>
-                  <a:srgbClr val="D4D4D4"/>
-                </a:solidFill>
-                <a:latin typeface="Courier New" pitchFamily="34" charset="0"/>
-                <a:ea typeface="Courier New" pitchFamily="34" charset="-122"/>
-                <a:cs typeface="Courier New" pitchFamily="34" charset="-120"/>
-              </a:rPr>
-              <a:t>(</a:t>
-            </a:r>
-            <a:pPr algn="l" indent="0" marL="0">
-              <a:lnSpc>
-                <a:spcPct val="108000"/>
-              </a:lnSpc>
-              <a:buNone/>
-            </a:pPr>
-            <a:r>
-              <a:rPr lang="en-US" sz="900" dirty="0">
-                <a:solidFill>
-                  <a:srgbClr val="D4D4D4"/>
-                </a:solidFill>
-                <a:latin typeface="Courier New" pitchFamily="34" charset="0"/>
-                <a:ea typeface="Courier New" pitchFamily="34" charset="-122"/>
-                <a:cs typeface="Courier New" pitchFamily="34" charset="-120"/>
-              </a:rPr>
-              <a:t>address</a:t>
-            </a:r>
-            <a:pPr algn="l" indent="0" marL="0">
-              <a:lnSpc>
-                <a:spcPct val="108000"/>
-              </a:lnSpc>
-              <a:buNone/>
-            </a:pPr>
-            <a:r>
-              <a:rPr lang="en-US" sz="900" dirty="0">
-                <a:solidFill>
-                  <a:srgbClr val="D4D4D4"/>
-                </a:solidFill>
-                <a:latin typeface="Courier New" pitchFamily="34" charset="0"/>
-                <a:ea typeface="Courier New" pitchFamily="34" charset="-122"/>
-                <a:cs typeface="Courier New" pitchFamily="34" charset="-120"/>
-              </a:rPr>
-              <a:t>).</a:t>
-            </a:r>
-            <a:pPr algn="l" indent="0" marL="0">
-              <a:lnSpc>
-                <a:spcPct val="108000"/>
-              </a:lnSpc>
-              <a:buNone/>
-            </a:pPr>
-            <a:r>
-              <a:rPr lang="en-US" sz="900" dirty="0">
-                <a:solidFill>
-                  <a:srgbClr val="D4D4D4"/>
-                </a:solidFill>
-                <a:latin typeface="Courier New" pitchFamily="34" charset="0"/>
-                <a:ea typeface="Courier New" pitchFamily="34" charset="-122"/>
-                <a:cs typeface="Courier New" pitchFamily="34" charset="-120"/>
-              </a:rPr>
-              <a:t>value</a:t>
-            </a:r>
-            <a:pPr algn="l" indent="0" marL="0">
-              <a:lnSpc>
-                <a:spcPct val="108000"/>
-              </a:lnSpc>
-              <a:buNone/>
-            </a:pPr>
-            <a:r>
-              <a:rPr lang="en-US" sz="900" dirty="0">
-                <a:solidFill>
-                  <a:srgbClr val="D4D4D4"/>
-                </a:solidFill>
-                <a:latin typeface="Courier New" pitchFamily="34" charset="0"/>
-                <a:ea typeface="Courier New" pitchFamily="34" charset="-122"/>
-                <a:cs typeface="Courier New" pitchFamily="34" charset="-120"/>
-              </a:rPr>
-              <a:t> = </a:t>
-            </a:r>
-            <a:pPr algn="l" indent="0" marL="0">
-              <a:lnSpc>
-                <a:spcPct val="108000"/>
-              </a:lnSpc>
-              <a:buNone/>
-            </a:pPr>
-            <a:r>
-              <a:rPr lang="en-US" sz="900" dirty="0">
-                <a:solidFill>
-                  <a:srgbClr val="D4D4D4"/>
-                </a:solidFill>
-                <a:latin typeface="Courier New" pitchFamily="34" charset="0"/>
-                <a:ea typeface="Courier New" pitchFamily="34" charset="-122"/>
-                <a:cs typeface="Courier New" pitchFamily="34" charset="-120"/>
-              </a:rPr>
-              <a:t>value</a:t>
+              <a:t>        </a:t>
+            </a:r>
+            <a:pPr algn="l" indent="0" marL="0">
+              <a:lnSpc>
+                <a:spcPct val="108000"/>
+              </a:lnSpc>
+              <a:buNone/>
+            </a:pPr>
+            <a:r>
+              <a:rPr lang="en-US" sz="900" dirty="0">
+                <a:solidFill>
+                  <a:srgbClr val="CE9178"/>
+                </a:solidFill>
+                <a:latin typeface="Courier New" pitchFamily="34" charset="0"/>
+                <a:ea typeface="Courier New" pitchFamily="34" charset="-122"/>
+                <a:cs typeface="Courier New" pitchFamily="34" charset="-120"/>
+              </a:rPr>
+              <a:t>"반드시 두 도구를 순서대로 사용해라."</a:t>
             </a:r>
             <a:endParaRPr lang="en-US" sz="900" dirty="0"/>
           </a:p>
@@ -4640,964 +5910,7 @@
                 <a:ea typeface="Courier New" pitchFamily="34" charset="-122"/>
                 <a:cs typeface="Courier New" pitchFamily="34" charset="-120"/>
               </a:rPr>
-              <a:t>            </a:t>
-            </a:r>
-            <a:pPr algn="l" indent="0" marL="0">
-              <a:lnSpc>
-                <a:spcPct val="108000"/>
-              </a:lnSpc>
-              <a:buNone/>
-            </a:pPr>
-            <a:r>
-              <a:rPr lang="en-US" sz="900" dirty="0">
-                <a:solidFill>
-                  <a:srgbClr val="569CD6"/>
-                </a:solidFill>
-                <a:latin typeface="Courier New" pitchFamily="34" charset="0"/>
-                <a:ea typeface="Courier New" pitchFamily="34" charset="-122"/>
-                <a:cs typeface="Courier New" pitchFamily="34" charset="-120"/>
-              </a:rPr>
-              <a:t>return</a:t>
-            </a:r>
-            <a:pPr algn="l" indent="0" marL="0">
-              <a:lnSpc>
-                <a:spcPct val="108000"/>
-              </a:lnSpc>
-              <a:buNone/>
-            </a:pPr>
-            <a:r>
-              <a:rPr lang="en-US" sz="900" dirty="0">
-                <a:solidFill>
-                  <a:srgbClr val="D4D4D4"/>
-                </a:solidFill>
-                <a:latin typeface="Courier New" pitchFamily="34" charset="0"/>
-                <a:ea typeface="Courier New" pitchFamily="34" charset="-122"/>
-                <a:cs typeface="Courier New" pitchFamily="34" charset="-120"/>
-              </a:rPr>
-              <a:t> </a:t>
-            </a:r>
-            <a:pPr algn="l" indent="0" marL="0">
-              <a:lnSpc>
-                <a:spcPct val="108000"/>
-              </a:lnSpc>
-              <a:buNone/>
-            </a:pPr>
-            <a:r>
-              <a:rPr lang="en-US" sz="900" dirty="0">
-                <a:solidFill>
-                  <a:srgbClr val="D4D4D4"/>
-                </a:solidFill>
-                <a:latin typeface="Courier New" pitchFamily="34" charset="0"/>
-                <a:ea typeface="Courier New" pitchFamily="34" charset="-122"/>
-                <a:cs typeface="Courier New" pitchFamily="34" charset="-120"/>
-              </a:rPr>
-              <a:t>f</a:t>
-            </a:r>
-            <a:pPr algn="l" indent="0" marL="0">
-              <a:lnSpc>
-                <a:spcPct val="108000"/>
-              </a:lnSpc>
-              <a:buNone/>
-            </a:pPr>
-            <a:r>
-              <a:rPr lang="en-US" sz="900" dirty="0">
-                <a:solidFill>
-                  <a:srgbClr val="CE9178"/>
-                </a:solidFill>
-                <a:latin typeface="Courier New" pitchFamily="34" charset="0"/>
-                <a:ea typeface="Courier New" pitchFamily="34" charset="-122"/>
-                <a:cs typeface="Courier New" pitchFamily="34" charset="-120"/>
-              </a:rPr>
-              <a:t>"{address} 에 '{value}' 를 기록했다."</a:t>
-            </a:r>
-            <a:endParaRPr lang="en-US" sz="900" dirty="0"/>
-          </a:p>
-          <a:p>
-            <a:pPr algn="l" indent="0" marL="0">
-              <a:lnSpc>
-                <a:spcPct val="108000"/>
-              </a:lnSpc>
-              <a:buNone/>
-            </a:pPr>
-            <a:r>
-              <a:rPr lang="en-US" sz="900" dirty="0">
-                <a:solidFill>
-                  <a:srgbClr val="D4D4D4"/>
-                </a:solidFill>
-                <a:latin typeface="Courier New" pitchFamily="34" charset="0"/>
-                <a:ea typeface="Courier New" pitchFamily="34" charset="-122"/>
-                <a:cs typeface="Courier New" pitchFamily="34" charset="-120"/>
-              </a:rPr>
-              <a:t> </a:t>
-            </a:r>
-            <a:endParaRPr lang="en-US" sz="900" dirty="0"/>
-          </a:p>
-          <a:p>
-            <a:pPr algn="l" indent="0" marL="0">
-              <a:lnSpc>
-                <a:spcPct val="108000"/>
-              </a:lnSpc>
-              <a:buNone/>
-            </a:pPr>
-            <a:r>
-              <a:rPr lang="en-US" sz="900" dirty="0">
-                <a:solidFill>
-                  <a:srgbClr val="D4D4D4"/>
-                </a:solidFill>
-                <a:latin typeface="Courier New" pitchFamily="34" charset="0"/>
-                <a:ea typeface="Courier New" pitchFamily="34" charset="-122"/>
-                <a:cs typeface="Courier New" pitchFamily="34" charset="-120"/>
-              </a:rPr>
-              <a:t>        @</a:t>
-            </a:r>
-            <a:pPr algn="l" indent="0" marL="0">
-              <a:lnSpc>
-                <a:spcPct val="108000"/>
-              </a:lnSpc>
-              <a:buNone/>
-            </a:pPr>
-            <a:r>
-              <a:rPr lang="en-US" sz="900" dirty="0">
-                <a:solidFill>
-                  <a:srgbClr val="D4D4D4"/>
-                </a:solidFill>
-                <a:latin typeface="Courier New" pitchFamily="34" charset="0"/>
-                <a:ea typeface="Courier New" pitchFamily="34" charset="-122"/>
-                <a:cs typeface="Courier New" pitchFamily="34" charset="-120"/>
-              </a:rPr>
-              <a:t>tool</a:t>
-            </a:r>
-            <a:endParaRPr lang="en-US" sz="900" dirty="0"/>
-          </a:p>
-          <a:p>
-            <a:pPr algn="l" indent="0" marL="0">
-              <a:lnSpc>
-                <a:spcPct val="108000"/>
-              </a:lnSpc>
-              <a:buNone/>
-            </a:pPr>
-            <a:r>
-              <a:rPr lang="en-US" sz="900" dirty="0">
-                <a:solidFill>
-                  <a:srgbClr val="D4D4D4"/>
-                </a:solidFill>
-                <a:latin typeface="Courier New" pitchFamily="34" charset="0"/>
-                <a:ea typeface="Courier New" pitchFamily="34" charset="-122"/>
-                <a:cs typeface="Courier New" pitchFamily="34" charset="-120"/>
-              </a:rPr>
-              <a:t>        </a:t>
-            </a:r>
-            <a:pPr algn="l" indent="0" marL="0">
-              <a:lnSpc>
-                <a:spcPct val="108000"/>
-              </a:lnSpc>
-              <a:buNone/>
-            </a:pPr>
-            <a:r>
-              <a:rPr lang="en-US" sz="900" dirty="0">
-                <a:solidFill>
-                  <a:srgbClr val="569CD6"/>
-                </a:solidFill>
-                <a:latin typeface="Courier New" pitchFamily="34" charset="0"/>
-                <a:ea typeface="Courier New" pitchFamily="34" charset="-122"/>
-                <a:cs typeface="Courier New" pitchFamily="34" charset="-120"/>
-              </a:rPr>
-              <a:t>def</a:t>
-            </a:r>
-            <a:pPr algn="l" indent="0" marL="0">
-              <a:lnSpc>
-                <a:spcPct val="108000"/>
-              </a:lnSpc>
-              <a:buNone/>
-            </a:pPr>
-            <a:r>
-              <a:rPr lang="en-US" sz="900" dirty="0">
-                <a:solidFill>
-                  <a:srgbClr val="D4D4D4"/>
-                </a:solidFill>
-                <a:latin typeface="Courier New" pitchFamily="34" charset="0"/>
-                <a:ea typeface="Courier New" pitchFamily="34" charset="-122"/>
-                <a:cs typeface="Courier New" pitchFamily="34" charset="-120"/>
-              </a:rPr>
-              <a:t> </a:t>
-            </a:r>
-            <a:pPr algn="l" indent="0" marL="0">
-              <a:lnSpc>
-                <a:spcPct val="108000"/>
-              </a:lnSpc>
-              <a:buNone/>
-            </a:pPr>
-            <a:r>
-              <a:rPr lang="en-US" sz="900" dirty="0">
-                <a:solidFill>
-                  <a:srgbClr val="DCDCAA"/>
-                </a:solidFill>
-                <a:latin typeface="Courier New" pitchFamily="34" charset="0"/>
-                <a:ea typeface="Courier New" pitchFamily="34" charset="-122"/>
-                <a:cs typeface="Courier New" pitchFamily="34" charset="-120"/>
-              </a:rPr>
-              <a:t>excel_read_cell</a:t>
-            </a:r>
-            <a:pPr algn="l" indent="0" marL="0">
-              <a:lnSpc>
-                <a:spcPct val="108000"/>
-              </a:lnSpc>
-              <a:buNone/>
-            </a:pPr>
-            <a:r>
-              <a:rPr lang="en-US" sz="900" dirty="0">
-                <a:solidFill>
-                  <a:srgbClr val="D4D4D4"/>
-                </a:solidFill>
-                <a:latin typeface="Courier New" pitchFamily="34" charset="0"/>
-                <a:ea typeface="Courier New" pitchFamily="34" charset="-122"/>
-                <a:cs typeface="Courier New" pitchFamily="34" charset="-120"/>
-              </a:rPr>
-              <a:t>(</a:t>
-            </a:r>
-            <a:pPr algn="l" indent="0" marL="0">
-              <a:lnSpc>
-                <a:spcPct val="108000"/>
-              </a:lnSpc>
-              <a:buNone/>
-            </a:pPr>
-            <a:r>
-              <a:rPr lang="en-US" sz="900" dirty="0">
-                <a:solidFill>
-                  <a:srgbClr val="D4D4D4"/>
-                </a:solidFill>
-                <a:latin typeface="Courier New" pitchFamily="34" charset="0"/>
-                <a:ea typeface="Courier New" pitchFamily="34" charset="-122"/>
-                <a:cs typeface="Courier New" pitchFamily="34" charset="-120"/>
-              </a:rPr>
-              <a:t>address</a:t>
-            </a:r>
-            <a:pPr algn="l" indent="0" marL="0">
-              <a:lnSpc>
-                <a:spcPct val="108000"/>
-              </a:lnSpc>
-              <a:buNone/>
-            </a:pPr>
-            <a:r>
-              <a:rPr lang="en-US" sz="900" dirty="0">
-                <a:solidFill>
-                  <a:srgbClr val="D4D4D4"/>
-                </a:solidFill>
-                <a:latin typeface="Courier New" pitchFamily="34" charset="0"/>
-                <a:ea typeface="Courier New" pitchFamily="34" charset="-122"/>
-                <a:cs typeface="Courier New" pitchFamily="34" charset="-120"/>
-              </a:rPr>
-              <a:t>: </a:t>
-            </a:r>
-            <a:pPr algn="l" indent="0" marL="0">
-              <a:lnSpc>
-                <a:spcPct val="108000"/>
-              </a:lnSpc>
-              <a:buNone/>
-            </a:pPr>
-            <a:r>
-              <a:rPr lang="en-US" sz="900" dirty="0">
-                <a:solidFill>
-                  <a:srgbClr val="D4D4D4"/>
-                </a:solidFill>
-                <a:latin typeface="Courier New" pitchFamily="34" charset="0"/>
-                <a:ea typeface="Courier New" pitchFamily="34" charset="-122"/>
-                <a:cs typeface="Courier New" pitchFamily="34" charset="-120"/>
-              </a:rPr>
-              <a:t>str</a:t>
-            </a:r>
-            <a:pPr algn="l" indent="0" marL="0">
-              <a:lnSpc>
-                <a:spcPct val="108000"/>
-              </a:lnSpc>
-              <a:buNone/>
-            </a:pPr>
-            <a:r>
-              <a:rPr lang="en-US" sz="900" dirty="0">
-                <a:solidFill>
-                  <a:srgbClr val="D4D4D4"/>
-                </a:solidFill>
-                <a:latin typeface="Courier New" pitchFamily="34" charset="0"/>
-                <a:ea typeface="Courier New" pitchFamily="34" charset="-122"/>
-                <a:cs typeface="Courier New" pitchFamily="34" charset="-120"/>
-              </a:rPr>
-              <a:t>) -&gt; </a:t>
-            </a:r>
-            <a:pPr algn="l" indent="0" marL="0">
-              <a:lnSpc>
-                <a:spcPct val="108000"/>
-              </a:lnSpc>
-              <a:buNone/>
-            </a:pPr>
-            <a:r>
-              <a:rPr lang="en-US" sz="900" dirty="0">
-                <a:solidFill>
-                  <a:srgbClr val="D4D4D4"/>
-                </a:solidFill>
-                <a:latin typeface="Courier New" pitchFamily="34" charset="0"/>
-                <a:ea typeface="Courier New" pitchFamily="34" charset="-122"/>
-                <a:cs typeface="Courier New" pitchFamily="34" charset="-120"/>
-              </a:rPr>
-              <a:t>str</a:t>
-            </a:r>
-            <a:pPr algn="l" indent="0" marL="0">
-              <a:lnSpc>
-                <a:spcPct val="108000"/>
-              </a:lnSpc>
-              <a:buNone/>
-            </a:pPr>
-            <a:r>
-              <a:rPr lang="en-US" sz="900" dirty="0">
-                <a:solidFill>
-                  <a:srgbClr val="D4D4D4"/>
-                </a:solidFill>
-                <a:latin typeface="Courier New" pitchFamily="34" charset="0"/>
-                <a:ea typeface="Courier New" pitchFamily="34" charset="-122"/>
-                <a:cs typeface="Courier New" pitchFamily="34" charset="-120"/>
-              </a:rPr>
-              <a:t>:</a:t>
-            </a:r>
-            <a:endParaRPr lang="en-US" sz="900" dirty="0"/>
-          </a:p>
-          <a:p>
-            <a:pPr algn="l" indent="0" marL="0">
-              <a:lnSpc>
-                <a:spcPct val="108000"/>
-              </a:lnSpc>
-              <a:buNone/>
-            </a:pPr>
-            <a:r>
-              <a:rPr lang="en-US" sz="900" dirty="0">
-                <a:solidFill>
-                  <a:srgbClr val="D4D4D4"/>
-                </a:solidFill>
-                <a:latin typeface="Courier New" pitchFamily="34" charset="0"/>
-                <a:ea typeface="Courier New" pitchFamily="34" charset="-122"/>
-                <a:cs typeface="Courier New" pitchFamily="34" charset="-120"/>
-              </a:rPr>
-              <a:t>            </a:t>
-            </a:r>
-            <a:pPr algn="l" indent="0" marL="0">
-              <a:lnSpc>
-                <a:spcPct val="108000"/>
-              </a:lnSpc>
-              <a:buNone/>
-            </a:pPr>
-            <a:r>
-              <a:rPr lang="en-US" sz="900" dirty="0">
-                <a:solidFill>
-                  <a:srgbClr val="CE9178"/>
-                </a:solidFill>
-                <a:latin typeface="Courier New" pitchFamily="34" charset="0"/>
-                <a:ea typeface="Courier New" pitchFamily="34" charset="-122"/>
-                <a:cs typeface="Courier New" pitchFamily="34" charset="-120"/>
-              </a:rPr>
-              <a:t>""</a:t>
-            </a:r>
-            <a:pPr algn="l" indent="0" marL="0">
-              <a:lnSpc>
-                <a:spcPct val="108000"/>
-              </a:lnSpc>
-              <a:buNone/>
-            </a:pPr>
-            <a:r>
-              <a:rPr lang="en-US" sz="900" dirty="0">
-                <a:solidFill>
-                  <a:srgbClr val="CE9178"/>
-                </a:solidFill>
-                <a:latin typeface="Courier New" pitchFamily="34" charset="0"/>
-                <a:ea typeface="Courier New" pitchFamily="34" charset="-122"/>
-                <a:cs typeface="Courier New" pitchFamily="34" charset="-120"/>
-              </a:rPr>
-              <a:t>"엑셀 시트의 특정 셀(예 'B2') 값을 읽어 돌려준다."</a:t>
-            </a:r>
-            <a:pPr algn="l" indent="0" marL="0">
-              <a:lnSpc>
-                <a:spcPct val="108000"/>
-              </a:lnSpc>
-              <a:buNone/>
-            </a:pPr>
-            <a:r>
-              <a:rPr lang="en-US" sz="900" dirty="0">
-                <a:solidFill>
-                  <a:srgbClr val="CE9178"/>
-                </a:solidFill>
-                <a:latin typeface="Courier New" pitchFamily="34" charset="0"/>
-                <a:ea typeface="Courier New" pitchFamily="34" charset="-122"/>
-                <a:cs typeface="Courier New" pitchFamily="34" charset="-120"/>
-              </a:rPr>
-              <a:t>""</a:t>
-            </a:r>
-            <a:endParaRPr lang="en-US" sz="900" dirty="0"/>
-          </a:p>
-          <a:p>
-            <a:pPr algn="l" indent="0" marL="0">
-              <a:lnSpc>
-                <a:spcPct val="108000"/>
-              </a:lnSpc>
-              <a:buNone/>
-            </a:pPr>
-            <a:r>
-              <a:rPr lang="en-US" sz="900" dirty="0">
-                <a:solidFill>
-                  <a:srgbClr val="D4D4D4"/>
-                </a:solidFill>
-                <a:latin typeface="Courier New" pitchFamily="34" charset="0"/>
-                <a:ea typeface="Courier New" pitchFamily="34" charset="-122"/>
-                <a:cs typeface="Courier New" pitchFamily="34" charset="-120"/>
-              </a:rPr>
-              <a:t>            </a:t>
-            </a:r>
-            <a:pPr algn="l" indent="0" marL="0">
-              <a:lnSpc>
-                <a:spcPct val="108000"/>
-              </a:lnSpc>
-              <a:buNone/>
-            </a:pPr>
-            <a:r>
-              <a:rPr lang="en-US" sz="900" dirty="0">
-                <a:solidFill>
-                  <a:srgbClr val="569CD6"/>
-                </a:solidFill>
-                <a:latin typeface="Courier New" pitchFamily="34" charset="0"/>
-                <a:ea typeface="Courier New" pitchFamily="34" charset="-122"/>
-                <a:cs typeface="Courier New" pitchFamily="34" charset="-120"/>
-              </a:rPr>
-              <a:t>return</a:t>
-            </a:r>
-            <a:pPr algn="l" indent="0" marL="0">
-              <a:lnSpc>
-                <a:spcPct val="108000"/>
-              </a:lnSpc>
-              <a:buNone/>
-            </a:pPr>
-            <a:r>
-              <a:rPr lang="en-US" sz="900" dirty="0">
-                <a:solidFill>
-                  <a:srgbClr val="D4D4D4"/>
-                </a:solidFill>
-                <a:latin typeface="Courier New" pitchFamily="34" charset="0"/>
-                <a:ea typeface="Courier New" pitchFamily="34" charset="-122"/>
-                <a:cs typeface="Courier New" pitchFamily="34" charset="-120"/>
-              </a:rPr>
-              <a:t> </a:t>
-            </a:r>
-            <a:pPr algn="l" indent="0" marL="0">
-              <a:lnSpc>
-                <a:spcPct val="108000"/>
-              </a:lnSpc>
-              <a:buNone/>
-            </a:pPr>
-            <a:r>
-              <a:rPr lang="en-US" sz="900" dirty="0">
-                <a:solidFill>
-                  <a:srgbClr val="D4D4D4"/>
-                </a:solidFill>
-                <a:latin typeface="Courier New" pitchFamily="34" charset="0"/>
-                <a:ea typeface="Courier New" pitchFamily="34" charset="-122"/>
-                <a:cs typeface="Courier New" pitchFamily="34" charset="-120"/>
-              </a:rPr>
-              <a:t>f</a:t>
-            </a:r>
-            <a:pPr algn="l" indent="0" marL="0">
-              <a:lnSpc>
-                <a:spcPct val="108000"/>
-              </a:lnSpc>
-              <a:buNone/>
-            </a:pPr>
-            <a:r>
-              <a:rPr lang="en-US" sz="900" dirty="0">
-                <a:solidFill>
-                  <a:srgbClr val="CE9178"/>
-                </a:solidFill>
-                <a:latin typeface="Courier New" pitchFamily="34" charset="0"/>
-                <a:ea typeface="Courier New" pitchFamily="34" charset="-122"/>
-                <a:cs typeface="Courier New" pitchFamily="34" charset="-120"/>
-              </a:rPr>
-              <a:t>"{address} = {sheet.range(address).value}"</a:t>
-            </a:r>
-            <a:endParaRPr lang="en-US" sz="900" dirty="0"/>
-          </a:p>
-          <a:p>
-            <a:pPr algn="l" indent="0" marL="0">
-              <a:lnSpc>
-                <a:spcPct val="108000"/>
-              </a:lnSpc>
-              <a:buNone/>
-            </a:pPr>
-            <a:r>
-              <a:rPr lang="en-US" sz="900" dirty="0">
-                <a:solidFill>
-                  <a:srgbClr val="D4D4D4"/>
-                </a:solidFill>
-                <a:latin typeface="Courier New" pitchFamily="34" charset="0"/>
-                <a:ea typeface="Courier New" pitchFamily="34" charset="-122"/>
-                <a:cs typeface="Courier New" pitchFamily="34" charset="-120"/>
-              </a:rPr>
-              <a:t> </a:t>
-            </a:r>
-            <a:endParaRPr lang="en-US" sz="900" dirty="0"/>
-          </a:p>
-          <a:p>
-            <a:pPr algn="l" indent="0" marL="0">
-              <a:lnSpc>
-                <a:spcPct val="108000"/>
-              </a:lnSpc>
-              <a:buNone/>
-            </a:pPr>
-            <a:r>
-              <a:rPr lang="en-US" sz="900" dirty="0">
-                <a:solidFill>
-                  <a:srgbClr val="D4D4D4"/>
-                </a:solidFill>
-                <a:latin typeface="Courier New" pitchFamily="34" charset="0"/>
-                <a:ea typeface="Courier New" pitchFamily="34" charset="-122"/>
-                <a:cs typeface="Courier New" pitchFamily="34" charset="-120"/>
-              </a:rPr>
-              <a:t>        </a:t>
-            </a:r>
-            <a:pPr algn="l" indent="0" marL="0">
-              <a:lnSpc>
-                <a:spcPct val="108000"/>
-              </a:lnSpc>
-              <a:buNone/>
-            </a:pPr>
-            <a:r>
-              <a:rPr lang="en-US" sz="900" dirty="0">
-                <a:solidFill>
-                  <a:srgbClr val="D4D4D4"/>
-                </a:solidFill>
-                <a:latin typeface="Courier New" pitchFamily="34" charset="0"/>
-                <a:ea typeface="Courier New" pitchFamily="34" charset="-122"/>
-                <a:cs typeface="Courier New" pitchFamily="34" charset="-120"/>
-              </a:rPr>
-              <a:t>agent</a:t>
-            </a:r>
-            <a:pPr algn="l" indent="0" marL="0">
-              <a:lnSpc>
-                <a:spcPct val="108000"/>
-              </a:lnSpc>
-              <a:buNone/>
-            </a:pPr>
-            <a:r>
-              <a:rPr lang="en-US" sz="900" dirty="0">
-                <a:solidFill>
-                  <a:srgbClr val="D4D4D4"/>
-                </a:solidFill>
-                <a:latin typeface="Courier New" pitchFamily="34" charset="0"/>
-                <a:ea typeface="Courier New" pitchFamily="34" charset="-122"/>
-                <a:cs typeface="Courier New" pitchFamily="34" charset="-120"/>
-              </a:rPr>
-              <a:t> = </a:t>
-            </a:r>
-            <a:pPr algn="l" indent="0" marL="0">
-              <a:lnSpc>
-                <a:spcPct val="108000"/>
-              </a:lnSpc>
-              <a:buNone/>
-            </a:pPr>
-            <a:r>
-              <a:rPr lang="en-US" sz="900" dirty="0">
-                <a:solidFill>
-                  <a:srgbClr val="DCDCAA"/>
-                </a:solidFill>
-                <a:latin typeface="Courier New" pitchFamily="34" charset="0"/>
-                <a:ea typeface="Courier New" pitchFamily="34" charset="-122"/>
-                <a:cs typeface="Courier New" pitchFamily="34" charset="-120"/>
-              </a:rPr>
-              <a:t>create_react_agent</a:t>
-            </a:r>
-            <a:pPr algn="l" indent="0" marL="0">
-              <a:lnSpc>
-                <a:spcPct val="108000"/>
-              </a:lnSpc>
-              <a:buNone/>
-            </a:pPr>
-            <a:r>
-              <a:rPr lang="en-US" sz="900" dirty="0">
-                <a:solidFill>
-                  <a:srgbClr val="D4D4D4"/>
-                </a:solidFill>
-                <a:latin typeface="Courier New" pitchFamily="34" charset="0"/>
-                <a:ea typeface="Courier New" pitchFamily="34" charset="-122"/>
-                <a:cs typeface="Courier New" pitchFamily="34" charset="-120"/>
-              </a:rPr>
-              <a:t>(</a:t>
-            </a:r>
-            <a:pPr algn="l" indent="0" marL="0">
-              <a:lnSpc>
-                <a:spcPct val="108000"/>
-              </a:lnSpc>
-              <a:buNone/>
-            </a:pPr>
-            <a:r>
-              <a:rPr lang="en-US" sz="900" dirty="0">
-                <a:solidFill>
-                  <a:srgbClr val="D4D4D4"/>
-                </a:solidFill>
-                <a:latin typeface="Courier New" pitchFamily="34" charset="0"/>
-                <a:ea typeface="Courier New" pitchFamily="34" charset="-122"/>
-                <a:cs typeface="Courier New" pitchFamily="34" charset="-120"/>
-              </a:rPr>
-              <a:t>model</a:t>
-            </a:r>
-            <a:pPr algn="l" indent="0" marL="0">
-              <a:lnSpc>
-                <a:spcPct val="108000"/>
-              </a:lnSpc>
-              <a:buNone/>
-            </a:pPr>
-            <a:r>
-              <a:rPr lang="en-US" sz="900" dirty="0">
-                <a:solidFill>
-                  <a:srgbClr val="D4D4D4"/>
-                </a:solidFill>
-                <a:latin typeface="Courier New" pitchFamily="34" charset="0"/>
-                <a:ea typeface="Courier New" pitchFamily="34" charset="-122"/>
-                <a:cs typeface="Courier New" pitchFamily="34" charset="-120"/>
-              </a:rPr>
-              <a:t>, [</a:t>
-            </a:r>
-            <a:pPr algn="l" indent="0" marL="0">
-              <a:lnSpc>
-                <a:spcPct val="108000"/>
-              </a:lnSpc>
-              <a:buNone/>
-            </a:pPr>
-            <a:r>
-              <a:rPr lang="en-US" sz="900" dirty="0">
-                <a:solidFill>
-                  <a:srgbClr val="D4D4D4"/>
-                </a:solidFill>
-                <a:latin typeface="Courier New" pitchFamily="34" charset="0"/>
-                <a:ea typeface="Courier New" pitchFamily="34" charset="-122"/>
-                <a:cs typeface="Courier New" pitchFamily="34" charset="-120"/>
-              </a:rPr>
-              <a:t>excel_write_cell</a:t>
-            </a:r>
-            <a:pPr algn="l" indent="0" marL="0">
-              <a:lnSpc>
-                <a:spcPct val="108000"/>
-              </a:lnSpc>
-              <a:buNone/>
-            </a:pPr>
-            <a:r>
-              <a:rPr lang="en-US" sz="900" dirty="0">
-                <a:solidFill>
-                  <a:srgbClr val="D4D4D4"/>
-                </a:solidFill>
-                <a:latin typeface="Courier New" pitchFamily="34" charset="0"/>
-                <a:ea typeface="Courier New" pitchFamily="34" charset="-122"/>
-                <a:cs typeface="Courier New" pitchFamily="34" charset="-120"/>
-              </a:rPr>
-              <a:t>, </a:t>
-            </a:r>
-            <a:pPr algn="l" indent="0" marL="0">
-              <a:lnSpc>
-                <a:spcPct val="108000"/>
-              </a:lnSpc>
-              <a:buNone/>
-            </a:pPr>
-            <a:r>
-              <a:rPr lang="en-US" sz="900" dirty="0">
-                <a:solidFill>
-                  <a:srgbClr val="D4D4D4"/>
-                </a:solidFill>
-                <a:latin typeface="Courier New" pitchFamily="34" charset="0"/>
-                <a:ea typeface="Courier New" pitchFamily="34" charset="-122"/>
-                <a:cs typeface="Courier New" pitchFamily="34" charset="-120"/>
-              </a:rPr>
-              <a:t>excel_read_cell</a:t>
-            </a:r>
-            <a:pPr algn="l" indent="0" marL="0">
-              <a:lnSpc>
-                <a:spcPct val="108000"/>
-              </a:lnSpc>
-              <a:buNone/>
-            </a:pPr>
-            <a:r>
-              <a:rPr lang="en-US" sz="900" dirty="0">
-                <a:solidFill>
-                  <a:srgbClr val="D4D4D4"/>
-                </a:solidFill>
-                <a:latin typeface="Courier New" pitchFamily="34" charset="0"/>
-                <a:ea typeface="Courier New" pitchFamily="34" charset="-122"/>
-                <a:cs typeface="Courier New" pitchFamily="34" charset="-120"/>
-              </a:rPr>
-              <a:t>])</a:t>
-            </a:r>
-            <a:endParaRPr lang="en-US" sz="900" dirty="0"/>
-          </a:p>
-          <a:p>
-            <a:pPr algn="l" indent="0" marL="0">
-              <a:lnSpc>
-                <a:spcPct val="108000"/>
-              </a:lnSpc>
-              <a:buNone/>
-            </a:pPr>
-            <a:r>
-              <a:rPr lang="en-US" sz="900" dirty="0">
-                <a:solidFill>
-                  <a:srgbClr val="D4D4D4"/>
-                </a:solidFill>
-                <a:latin typeface="Courier New" pitchFamily="34" charset="0"/>
-                <a:ea typeface="Courier New" pitchFamily="34" charset="-122"/>
-                <a:cs typeface="Courier New" pitchFamily="34" charset="-120"/>
-              </a:rPr>
-              <a:t>        </a:t>
-            </a:r>
-            <a:pPr algn="l" indent="0" marL="0">
-              <a:lnSpc>
-                <a:spcPct val="108000"/>
-              </a:lnSpc>
-              <a:buNone/>
-            </a:pPr>
-            <a:r>
-              <a:rPr lang="en-US" sz="900" dirty="0">
-                <a:solidFill>
-                  <a:srgbClr val="D4D4D4"/>
-                </a:solidFill>
-                <a:latin typeface="Courier New" pitchFamily="34" charset="0"/>
-                <a:ea typeface="Courier New" pitchFamily="34" charset="-122"/>
-                <a:cs typeface="Courier New" pitchFamily="34" charset="-120"/>
-              </a:rPr>
-              <a:t>token</a:t>
-            </a:r>
-            <a:pPr algn="l" indent="0" marL="0">
-              <a:lnSpc>
-                <a:spcPct val="108000"/>
-              </a:lnSpc>
-              <a:buNone/>
-            </a:pPr>
-            <a:r>
-              <a:rPr lang="en-US" sz="900" dirty="0">
-                <a:solidFill>
-                  <a:srgbClr val="D4D4D4"/>
-                </a:solidFill>
-                <a:latin typeface="Courier New" pitchFamily="34" charset="0"/>
-                <a:ea typeface="Courier New" pitchFamily="34" charset="-122"/>
-                <a:cs typeface="Courier New" pitchFamily="34" charset="-120"/>
-              </a:rPr>
-              <a:t> = </a:t>
-            </a:r>
-            <a:pPr algn="l" indent="0" marL="0">
-              <a:lnSpc>
-                <a:spcPct val="108000"/>
-              </a:lnSpc>
-              <a:buNone/>
-            </a:pPr>
-            <a:r>
-              <a:rPr lang="en-US" sz="900" dirty="0">
-                <a:solidFill>
-                  <a:srgbClr val="CE9178"/>
-                </a:solidFill>
-                <a:latin typeface="Courier New" pitchFamily="34" charset="0"/>
-                <a:ea typeface="Courier New" pitchFamily="34" charset="-122"/>
-                <a:cs typeface="Courier New" pitchFamily="34" charset="-120"/>
-              </a:rPr>
-              <a:t>"엑셀툴검증OK"</a:t>
-            </a:r>
-            <a:endParaRPr lang="en-US" sz="900" dirty="0"/>
-          </a:p>
-          <a:p>
-            <a:pPr algn="l" indent="0" marL="0">
-              <a:lnSpc>
-                <a:spcPct val="108000"/>
-              </a:lnSpc>
-              <a:buNone/>
-            </a:pPr>
-            <a:r>
-              <a:rPr lang="en-US" sz="900" dirty="0">
-                <a:solidFill>
-                  <a:srgbClr val="D4D4D4"/>
-                </a:solidFill>
-                <a:latin typeface="Courier New" pitchFamily="34" charset="0"/>
-                <a:ea typeface="Courier New" pitchFamily="34" charset="-122"/>
-                <a:cs typeface="Courier New" pitchFamily="34" charset="-120"/>
-              </a:rPr>
-              <a:t>        </a:t>
-            </a:r>
-            <a:pPr algn="l" indent="0" marL="0">
-              <a:lnSpc>
-                <a:spcPct val="108000"/>
-              </a:lnSpc>
-              <a:buNone/>
-            </a:pPr>
-            <a:r>
-              <a:rPr lang="en-US" sz="900" dirty="0">
-                <a:solidFill>
-                  <a:srgbClr val="D4D4D4"/>
-                </a:solidFill>
-                <a:latin typeface="Courier New" pitchFamily="34" charset="0"/>
-                <a:ea typeface="Courier New" pitchFamily="34" charset="-122"/>
-                <a:cs typeface="Courier New" pitchFamily="34" charset="-120"/>
-              </a:rPr>
-              <a:t>prompt</a:t>
-            </a:r>
-            <a:pPr algn="l" indent="0" marL="0">
-              <a:lnSpc>
-                <a:spcPct val="108000"/>
-              </a:lnSpc>
-              <a:buNone/>
-            </a:pPr>
-            <a:r>
-              <a:rPr lang="en-US" sz="900" dirty="0">
-                <a:solidFill>
-                  <a:srgbClr val="D4D4D4"/>
-                </a:solidFill>
-                <a:latin typeface="Courier New" pitchFamily="34" charset="0"/>
-                <a:ea typeface="Courier New" pitchFamily="34" charset="-122"/>
-                <a:cs typeface="Courier New" pitchFamily="34" charset="-120"/>
-              </a:rPr>
-              <a:t> = (</a:t>
-            </a:r>
-            <a:endParaRPr lang="en-US" sz="900" dirty="0"/>
-          </a:p>
-          <a:p>
-            <a:pPr algn="l" indent="0" marL="0">
-              <a:lnSpc>
-                <a:spcPct val="108000"/>
-              </a:lnSpc>
-              <a:buNone/>
-            </a:pPr>
-            <a:r>
-              <a:rPr lang="en-US" sz="900" dirty="0">
-                <a:solidFill>
-                  <a:srgbClr val="D4D4D4"/>
-                </a:solidFill>
-                <a:latin typeface="Courier New" pitchFamily="34" charset="0"/>
-                <a:ea typeface="Courier New" pitchFamily="34" charset="-122"/>
-                <a:cs typeface="Courier New" pitchFamily="34" charset="-120"/>
-              </a:rPr>
-              <a:t>            </a:t>
-            </a:r>
-            <a:pPr algn="l" indent="0" marL="0">
-              <a:lnSpc>
-                <a:spcPct val="108000"/>
-              </a:lnSpc>
-              <a:buNone/>
-            </a:pPr>
-            <a:r>
-              <a:rPr lang="en-US" sz="900" dirty="0">
-                <a:solidFill>
-                  <a:srgbClr val="D4D4D4"/>
-                </a:solidFill>
-                <a:latin typeface="Courier New" pitchFamily="34" charset="0"/>
-                <a:ea typeface="Courier New" pitchFamily="34" charset="-122"/>
-                <a:cs typeface="Courier New" pitchFamily="34" charset="-120"/>
-              </a:rPr>
-              <a:t>f</a:t>
-            </a:r>
-            <a:pPr algn="l" indent="0" marL="0">
-              <a:lnSpc>
-                <a:spcPct val="108000"/>
-              </a:lnSpc>
-              <a:buNone/>
-            </a:pPr>
-            <a:r>
-              <a:rPr lang="en-US" sz="900" dirty="0">
-                <a:solidFill>
-                  <a:srgbClr val="CE9178"/>
-                </a:solidFill>
-                <a:latin typeface="Courier New" pitchFamily="34" charset="0"/>
-                <a:ea typeface="Courier New" pitchFamily="34" charset="-122"/>
-                <a:cs typeface="Courier New" pitchFamily="34" charset="-120"/>
-              </a:rPr>
-              <a:t>"먼저 excel_write_cell 로 셀 B2 에 '{token}' 를 기록해라. "</a:t>
-            </a:r>
-            <a:endParaRPr lang="en-US" sz="900" dirty="0"/>
-          </a:p>
-          <a:p>
-            <a:pPr algn="l" indent="0" marL="0">
-              <a:lnSpc>
-                <a:spcPct val="108000"/>
-              </a:lnSpc>
-              <a:buNone/>
-            </a:pPr>
-            <a:r>
-              <a:rPr lang="en-US" sz="900" dirty="0">
-                <a:solidFill>
-                  <a:srgbClr val="D4D4D4"/>
-                </a:solidFill>
-                <a:latin typeface="Courier New" pitchFamily="34" charset="0"/>
-                <a:ea typeface="Courier New" pitchFamily="34" charset="-122"/>
-                <a:cs typeface="Courier New" pitchFamily="34" charset="-120"/>
-              </a:rPr>
-              <a:t>            </a:t>
-            </a:r>
-            <a:pPr algn="l" indent="0" marL="0">
-              <a:lnSpc>
-                <a:spcPct val="108000"/>
-              </a:lnSpc>
-              <a:buNone/>
-            </a:pPr>
-            <a:r>
-              <a:rPr lang="en-US" sz="900" dirty="0">
-                <a:solidFill>
-                  <a:srgbClr val="CE9178"/>
-                </a:solidFill>
-                <a:latin typeface="Courier New" pitchFamily="34" charset="0"/>
-                <a:ea typeface="Courier New" pitchFamily="34" charset="-122"/>
-                <a:cs typeface="Courier New" pitchFamily="34" charset="-120"/>
-              </a:rPr>
-              <a:t>"그다음 excel_read_cell 로 B2 를 읽어 그 값을 그대로 알려줘. "</a:t>
-            </a:r>
-            <a:endParaRPr lang="en-US" sz="900" dirty="0"/>
-          </a:p>
-          <a:p>
-            <a:pPr algn="l" indent="0" marL="0">
-              <a:lnSpc>
-                <a:spcPct val="108000"/>
-              </a:lnSpc>
-              <a:buNone/>
-            </a:pPr>
-            <a:r>
-              <a:rPr lang="en-US" sz="900" dirty="0">
-                <a:solidFill>
-                  <a:srgbClr val="D4D4D4"/>
-                </a:solidFill>
-                <a:latin typeface="Courier New" pitchFamily="34" charset="0"/>
-                <a:ea typeface="Courier New" pitchFamily="34" charset="-122"/>
-                <a:cs typeface="Courier New" pitchFamily="34" charset="-120"/>
-              </a:rPr>
-              <a:t>            </a:t>
-            </a:r>
-            <a:pPr algn="l" indent="0" marL="0">
-              <a:lnSpc>
-                <a:spcPct val="108000"/>
-              </a:lnSpc>
-              <a:buNone/>
-            </a:pPr>
-            <a:r>
-              <a:rPr lang="en-US" sz="900" dirty="0">
-                <a:solidFill>
-                  <a:srgbClr val="CE9178"/>
-                </a:solidFill>
-                <a:latin typeface="Courier New" pitchFamily="34" charset="0"/>
-                <a:ea typeface="Courier New" pitchFamily="34" charset="-122"/>
-                <a:cs typeface="Courier New" pitchFamily="34" charset="-120"/>
-              </a:rPr>
-              <a:t>"반드시 두 도구를 순서대로 사용해라."</a:t>
-            </a:r>
-            <a:endParaRPr lang="en-US" sz="900" dirty="0"/>
-          </a:p>
-          <a:p>
-            <a:pPr algn="l" indent="0" marL="0">
-              <a:lnSpc>
-                <a:spcPct val="108000"/>
-              </a:lnSpc>
-              <a:buNone/>
-            </a:pPr>
-            <a:r>
-              <a:rPr lang="en-US" sz="900" dirty="0">
-                <a:solidFill>
-                  <a:srgbClr val="D4D4D4"/>
-                </a:solidFill>
-                <a:latin typeface="Courier New" pitchFamily="34" charset="0"/>
-                <a:ea typeface="Courier New" pitchFamily="34" charset="-122"/>
-                <a:cs typeface="Courier New" pitchFamily="34" charset="-120"/>
-              </a:rPr>
-              <a:t>        )</a:t>
+              <a:t>    )</a:t>
             </a:r>
             <a:endParaRPr lang="en-US" sz="900" dirty="0"/>
           </a:p>
@@ -5629,6 +5942,10 @@
             <a:prstDash val="solid"/>
           </a:ln>
         </p:spPr>
+        <p:txBody>
+          <a:bodyPr/>
+          <a:p/>
+        </p:txBody>
       </p:sp>
       <p:sp>
         <p:nvSpPr>
@@ -5718,6 +6035,10 @@
             <a:prstDash val="solid"/>
           </a:ln>
         </p:spPr>
+        <p:txBody>
+          <a:bodyPr/>
+          <a:p/>
+        </p:txBody>
       </p:sp>
       <p:sp>
         <p:nvSpPr>
@@ -5856,6 +6177,74 @@
               <a:t>10</a:t>
             </a:r>
             <a:endParaRPr lang="en-US" sz="900" dirty="0"/>
+          </a:p>
+        </p:txBody>
+      </p:sp>
+      <p:sp>
+        <p:nvSpPr>
+          <p:cNvPr id="15" name="TextBox 14"/>
+          <p:cNvSpPr txBox="1"/>
+          <p:nvPr/>
+        </p:nvSpPr>
+        <p:spPr>
+          <a:xfrm>
+            <a:off x="7589520" y="5943600"/>
+            <a:ext cx="3962095" cy="274320"/>
+          </a:xfrm>
+          <a:prstGeom prst="rect">
+            <a:avLst/>
+          </a:prstGeom>
+          <a:noFill/>
+        </p:spPr>
+        <p:txBody>
+          <a:bodyPr wrap="square" lIns="0" rIns="0" tIns="0" bIns="0" anchor="ctr">
+            <a:spAutoFit/>
+          </a:bodyPr>
+          <a:lstStyle/>
+          <a:p>
+            <a:r>
+              <a:rPr sz="850">
+                <a:solidFill>
+                  <a:srgbClr val="5F7075"/>
+                </a:solidFill>
+                <a:latin typeface="Courier New"/>
+              </a:rPr>
+              <a:t>실행: python examples/tool_calling_step_by_step.py --step 6</a:t>
+            </a:r>
+          </a:p>
+        </p:txBody>
+      </p:sp>
+      <p:sp>
+        <p:nvSpPr>
+          <p:cNvPr id="16" name="TextBox 15"/>
+          <p:cNvSpPr txBox="1"/>
+          <p:nvPr/>
+        </p:nvSpPr>
+        <p:spPr>
+          <a:xfrm>
+            <a:off x="640080" y="5998464"/>
+            <a:ext cx="6675120" cy="274320"/>
+          </a:xfrm>
+          <a:prstGeom prst="rect">
+            <a:avLst/>
+          </a:prstGeom>
+          <a:noFill/>
+        </p:spPr>
+        <p:txBody>
+          <a:bodyPr wrap="square" lIns="0" rIns="0" tIns="0" bIns="0" anchor="ctr">
+            <a:spAutoFit/>
+          </a:bodyPr>
+          <a:lstStyle/>
+          <a:p>
+            <a:r>
+              <a:rPr sz="1100" b="1">
+                <a:solidFill>
+                  <a:srgbClr val="028090"/>
+                </a:solidFill>
+                <a:latin typeface="Calibri"/>
+              </a:rPr>
+              <a:t>tool_calling_step_by_step.py — step_6 내부 (일부)</a:t>
+            </a:r>
           </a:p>
         </p:txBody>
       </p:sp>
@@ -6002,6 +6391,10 @@
             </a:outerShdw>
           </a:effectLst>
         </p:spPr>
+        <p:txBody>
+          <a:bodyPr/>
+          <a:p/>
+        </p:txBody>
       </p:sp>
       <p:sp>
         <p:nvSpPr>
@@ -6027,6 +6420,10 @@
             <a:prstDash val="solid"/>
           </a:ln>
         </p:spPr>
+        <p:txBody>
+          <a:bodyPr/>
+          <a:p/>
+        </p:txBody>
       </p:sp>
       <p:sp>
         <p:nvSpPr>
@@ -6052,6 +6449,10 @@
             <a:prstDash val="solid"/>
           </a:ln>
         </p:spPr>
+        <p:txBody>
+          <a:bodyPr/>
+          <a:p/>
+        </p:txBody>
       </p:sp>
       <p:sp>
         <p:nvSpPr>
@@ -6077,6 +6478,10 @@
             <a:prstDash val="solid"/>
           </a:ln>
         </p:spPr>
+        <p:txBody>
+          <a:bodyPr/>
+          <a:p/>
+        </p:txBody>
       </p:sp>
       <p:sp>
         <p:nvSpPr>
@@ -6466,6 +6871,10 @@
             <a:prstDash val="solid"/>
           </a:ln>
         </p:spPr>
+        <p:txBody>
+          <a:bodyPr/>
+          <a:p/>
+        </p:txBody>
       </p:sp>
       <p:sp>
         <p:nvSpPr>
@@ -6663,6 +7072,10 @@
             <a:prstDash val="solid"/>
           </a:ln>
         </p:spPr>
+        <p:txBody>
+          <a:bodyPr/>
+          <a:p/>
+        </p:txBody>
       </p:sp>
       <p:sp>
         <p:nvSpPr>
@@ -6766,6 +7179,10 @@
             <a:prstDash val="solid"/>
           </a:ln>
         </p:spPr>
+        <p:txBody>
+          <a:bodyPr/>
+          <a:p/>
+        </p:txBody>
       </p:sp>
       <p:sp>
         <p:nvSpPr>
@@ -6872,6 +7289,10 @@
             <a:prstDash val="solid"/>
           </a:ln>
         </p:spPr>
+        <p:txBody>
+          <a:bodyPr/>
+          <a:p/>
+        </p:txBody>
       </p:sp>
       <p:sp>
         <p:nvSpPr>
@@ -6978,6 +7399,10 @@
             <a:prstDash val="solid"/>
           </a:ln>
         </p:spPr>
+        <p:txBody>
+          <a:bodyPr/>
+          <a:p/>
+        </p:txBody>
       </p:sp>
       <p:sp>
         <p:nvSpPr>
@@ -7084,6 +7509,10 @@
             <a:prstDash val="solid"/>
           </a:ln>
         </p:spPr>
+        <p:txBody>
+          <a:bodyPr/>
+          <a:p/>
+        </p:txBody>
       </p:sp>
       <p:sp>
         <p:nvSpPr>
@@ -7222,6 +7651,10 @@
             <a:prstDash val="solid"/>
           </a:ln>
         </p:spPr>
+        <p:txBody>
+          <a:bodyPr/>
+          <a:p/>
+        </p:txBody>
       </p:sp>
       <p:sp>
         <p:nvSpPr>
@@ -7247,6 +7680,10 @@
             <a:prstDash val="solid"/>
           </a:ln>
         </p:spPr>
+        <p:txBody>
+          <a:bodyPr/>
+          <a:p/>
+        </p:txBody>
       </p:sp>
       <p:sp>
         <p:nvSpPr>
@@ -7541,6 +7978,10 @@
             <a:prstDash val="solid"/>
           </a:ln>
         </p:spPr>
+        <p:txBody>
+          <a:bodyPr/>
+          <a:p/>
+        </p:txBody>
       </p:sp>
       <p:sp>
         <p:nvSpPr>
@@ -7653,7 +8094,7 @@
                 <a:ea typeface="Calibri" pitchFamily="34" charset="-122"/>
                 <a:cs typeface="Calibri" pitchFamily="34" charset="-120"/>
               </a:rPr>
-              <a:t>도구 없이 vs 도구 있이 — 큰 수 곱셈으로 비교</a:t>
+              <a:t>도구 없이 vs 도구 있이 — 큰 수 곱셈으로 비교 — tool_calling_step_by_step.py 로 실습</a:t>
             </a:r>
             <a:endParaRPr lang="en-US" sz="1450" dirty="0"/>
           </a:p>
@@ -7681,6 +8122,10 @@
             <a:prstDash val="solid"/>
           </a:ln>
         </p:spPr>
+        <p:txBody>
+          <a:bodyPr/>
+          <a:p/>
+        </p:txBody>
       </p:sp>
       <p:sp>
         <p:nvSpPr>
@@ -7706,6 +8151,10 @@
             <a:prstDash val="solid"/>
           </a:ln>
         </p:spPr>
+        <p:txBody>
+          <a:bodyPr/>
+          <a:p/>
+        </p:txBody>
       </p:sp>
       <p:sp>
         <p:nvSpPr>
@@ -7846,6 +8295,10 @@
             <a:prstDash val="solid"/>
           </a:ln>
         </p:spPr>
+        <p:txBody>
+          <a:bodyPr/>
+          <a:p/>
+        </p:txBody>
       </p:sp>
       <p:sp>
         <p:nvSpPr>
@@ -7871,6 +8324,10 @@
             <a:prstDash val="solid"/>
           </a:ln>
         </p:spPr>
+        <p:txBody>
+          <a:bodyPr/>
+          <a:p/>
+        </p:txBody>
       </p:sp>
       <p:sp>
         <p:nvSpPr>
@@ -8011,6 +8468,10 @@
             <a:prstDash val="solid"/>
           </a:ln>
         </p:spPr>
+        <p:txBody>
+          <a:bodyPr/>
+          <a:p/>
+        </p:txBody>
       </p:sp>
       <p:sp>
         <p:nvSpPr>
@@ -8036,6 +8497,10 @@
             <a:prstDash val="solid"/>
           </a:ln>
         </p:spPr>
+        <p:txBody>
+          <a:bodyPr/>
+          <a:p/>
+        </p:txBody>
       </p:sp>
       <p:sp>
         <p:nvSpPr>
@@ -8407,6 +8872,10 @@
             <a:prstDash val="solid"/>
           </a:ln>
         </p:spPr>
+        <p:txBody>
+          <a:bodyPr/>
+          <a:p/>
+        </p:txBody>
       </p:sp>
       <p:sp>
         <p:nvSpPr>
@@ -8432,6 +8901,10 @@
             <a:prstDash val="solid"/>
           </a:ln>
         </p:spPr>
+        <p:txBody>
+          <a:bodyPr/>
+          <a:p/>
+        </p:txBody>
       </p:sp>
       <p:sp>
         <p:nvSpPr>
@@ -8608,6 +9081,10 @@
             <a:tailEnd type="triangle"/>
           </a:ln>
         </p:spPr>
+        <p:txBody>
+          <a:bodyPr/>
+          <a:p/>
+        </p:txBody>
       </p:sp>
       <p:sp>
         <p:nvSpPr>
@@ -8635,6 +9112,10 @@
             <a:prstDash val="solid"/>
           </a:ln>
         </p:spPr>
+        <p:txBody>
+          <a:bodyPr/>
+          <a:p/>
+        </p:txBody>
       </p:sp>
       <p:sp>
         <p:nvSpPr>
@@ -8660,6 +9141,10 @@
             <a:prstDash val="solid"/>
           </a:ln>
         </p:spPr>
+        <p:txBody>
+          <a:bodyPr/>
+          <a:p/>
+        </p:txBody>
       </p:sp>
       <p:sp>
         <p:nvSpPr>
@@ -8839,6 +9324,10 @@
             <a:prstDash val="solid"/>
           </a:ln>
         </p:spPr>
+        <p:txBody>
+          <a:bodyPr/>
+          <a:p/>
+        </p:txBody>
       </p:sp>
       <p:sp>
         <p:nvSpPr>
@@ -9045,7 +9534,7 @@
                 <a:ea typeface="Calibri" pitchFamily="34" charset="-122"/>
                 <a:cs typeface="Calibri" pitchFamily="34" charset="-120"/>
               </a:rPr>
-              <a:t>코드 뜯어보기 ①</a:t>
+              <a:t>코드 뜯어보기 ① — tool_calling_step_by_step.py</a:t>
             </a:r>
             <a:endParaRPr lang="en-US" sz="1200" dirty="0"/>
           </a:p>
@@ -9123,6 +9612,10 @@
             </a:outerShdw>
           </a:effectLst>
         </p:spPr>
+        <p:txBody>
+          <a:bodyPr/>
+          <a:p/>
+        </p:txBody>
       </p:sp>
       <p:sp>
         <p:nvSpPr>
@@ -9148,6 +9641,10 @@
             <a:prstDash val="solid"/>
           </a:ln>
         </p:spPr>
+        <p:txBody>
+          <a:bodyPr/>
+          <a:p/>
+        </p:txBody>
       </p:sp>
       <p:sp>
         <p:nvSpPr>
@@ -9173,6 +9670,10 @@
             <a:prstDash val="solid"/>
           </a:ln>
         </p:spPr>
+        <p:txBody>
+          <a:bodyPr/>
+          <a:p/>
+        </p:txBody>
       </p:sp>
       <p:sp>
         <p:nvSpPr>
@@ -9198,6 +9699,10 @@
             <a:prstDash val="solid"/>
           </a:ln>
         </p:spPr>
+        <p:txBody>
+          <a:bodyPr/>
+          <a:p/>
+        </p:txBody>
       </p:sp>
       <p:sp>
         <p:nvSpPr>
@@ -10053,6 +10558,10 @@
             <a:prstDash val="solid"/>
           </a:ln>
         </p:spPr>
+        <p:txBody>
+          <a:bodyPr/>
+          <a:p/>
+        </p:txBody>
       </p:sp>
       <p:sp>
         <p:nvSpPr>
@@ -10162,6 +10671,10 @@
             <a:prstDash val="solid"/>
           </a:ln>
         </p:spPr>
+        <p:txBody>
+          <a:bodyPr/>
+          <a:p/>
+        </p:txBody>
       </p:sp>
       <p:sp>
         <p:nvSpPr>
@@ -10300,6 +10813,40 @@
               <a:t>3</a:t>
             </a:r>
             <a:endParaRPr lang="en-US" sz="900" dirty="0"/>
+          </a:p>
+        </p:txBody>
+      </p:sp>
+      <p:sp>
+        <p:nvSpPr>
+          <p:cNvPr id="15" name="TextBox 14"/>
+          <p:cNvSpPr txBox="1"/>
+          <p:nvPr/>
+        </p:nvSpPr>
+        <p:spPr>
+          <a:xfrm>
+            <a:off x="7589520" y="5943600"/>
+            <a:ext cx="3962095" cy="274320"/>
+          </a:xfrm>
+          <a:prstGeom prst="rect">
+            <a:avLst/>
+          </a:prstGeom>
+          <a:noFill/>
+        </p:spPr>
+        <p:txBody>
+          <a:bodyPr wrap="square" lIns="0" rIns="0" tIns="0" bIns="0" anchor="ctr">
+            <a:spAutoFit/>
+          </a:bodyPr>
+          <a:lstStyle/>
+          <a:p>
+            <a:r>
+              <a:rPr sz="850">
+                <a:solidFill>
+                  <a:srgbClr val="5F7075"/>
+                </a:solidFill>
+                <a:latin typeface="Courier New"/>
+              </a:rPr>
+              <a:t>실행: python examples/tool_calling_step_by_step.py --step 1</a:t>
+            </a:r>
           </a:p>
         </p:txBody>
       </p:sp>
@@ -10446,6 +10993,10 @@
             </a:outerShdw>
           </a:effectLst>
         </p:spPr>
+        <p:txBody>
+          <a:bodyPr/>
+          <a:p/>
+        </p:txBody>
       </p:sp>
       <p:sp>
         <p:nvSpPr>
@@ -10471,6 +11022,10 @@
             <a:prstDash val="solid"/>
           </a:ln>
         </p:spPr>
+        <p:txBody>
+          <a:bodyPr/>
+          <a:p/>
+        </p:txBody>
       </p:sp>
       <p:sp>
         <p:nvSpPr>
@@ -10496,6 +11051,10 @@
             <a:prstDash val="solid"/>
           </a:ln>
         </p:spPr>
+        <p:txBody>
+          <a:bodyPr/>
+          <a:p/>
+        </p:txBody>
       </p:sp>
       <p:sp>
         <p:nvSpPr>
@@ -10521,6 +11080,10 @@
             <a:prstDash val="solid"/>
           </a:ln>
         </p:spPr>
+        <p:txBody>
+          <a:bodyPr/>
+          <a:p/>
+        </p:txBody>
       </p:sp>
       <p:sp>
         <p:nvSpPr>
@@ -12034,6 +12597,10 @@
             <a:prstDash val="solid"/>
           </a:ln>
         </p:spPr>
+        <p:txBody>
+          <a:bodyPr/>
+          <a:p/>
+        </p:txBody>
       </p:sp>
       <p:sp>
         <p:nvSpPr>
@@ -12123,6 +12690,10 @@
             <a:prstDash val="solid"/>
           </a:ln>
         </p:spPr>
+        <p:txBody>
+          <a:bodyPr/>
+          <a:p/>
+        </p:txBody>
       </p:sp>
       <p:sp>
         <p:nvSpPr>
@@ -12261,6 +12832,40 @@
               <a:t>4</a:t>
             </a:r>
             <a:endParaRPr lang="en-US" sz="900" dirty="0"/>
+          </a:p>
+        </p:txBody>
+      </p:sp>
+      <p:sp>
+        <p:nvSpPr>
+          <p:cNvPr id="15" name="TextBox 14"/>
+          <p:cNvSpPr txBox="1"/>
+          <p:nvPr/>
+        </p:nvSpPr>
+        <p:spPr>
+          <a:xfrm>
+            <a:off x="7589520" y="5943600"/>
+            <a:ext cx="3962095" cy="274320"/>
+          </a:xfrm>
+          <a:prstGeom prst="rect">
+            <a:avLst/>
+          </a:prstGeom>
+          <a:noFill/>
+        </p:spPr>
+        <p:txBody>
+          <a:bodyPr wrap="square" lIns="0" rIns="0" tIns="0" bIns="0" anchor="ctr">
+            <a:spAutoFit/>
+          </a:bodyPr>
+          <a:lstStyle/>
+          <a:p>
+            <a:r>
+              <a:rPr sz="850">
+                <a:solidFill>
+                  <a:srgbClr val="5F7075"/>
+                </a:solidFill>
+                <a:latin typeface="Courier New"/>
+              </a:rPr>
+              <a:t>실행: python examples/tool_calling_step_by_step.py --step 2</a:t>
+            </a:r>
           </a:p>
         </p:txBody>
       </p:sp>
@@ -12407,6 +13012,10 @@
             </a:outerShdw>
           </a:effectLst>
         </p:spPr>
+        <p:txBody>
+          <a:bodyPr/>
+          <a:p/>
+        </p:txBody>
       </p:sp>
       <p:sp>
         <p:nvSpPr>
@@ -12432,6 +13041,10 @@
             <a:prstDash val="solid"/>
           </a:ln>
         </p:spPr>
+        <p:txBody>
+          <a:bodyPr/>
+          <a:p/>
+        </p:txBody>
       </p:sp>
       <p:sp>
         <p:nvSpPr>
@@ -12457,6 +13070,10 @@
             <a:prstDash val="solid"/>
           </a:ln>
         </p:spPr>
+        <p:txBody>
+          <a:bodyPr/>
+          <a:p/>
+        </p:txBody>
       </p:sp>
       <p:sp>
         <p:nvSpPr>
@@ -12482,6 +13099,10 @@
             <a:prstDash val="solid"/>
           </a:ln>
         </p:spPr>
+        <p:txBody>
+          <a:bodyPr/>
+          <a:p/>
+        </p:txBody>
       </p:sp>
       <p:sp>
         <p:nvSpPr>
@@ -13672,6 +14293,10 @@
             <a:prstDash val="solid"/>
           </a:ln>
         </p:spPr>
+        <p:txBody>
+          <a:bodyPr/>
+          <a:p/>
+        </p:txBody>
       </p:sp>
       <p:sp>
         <p:nvSpPr>
@@ -13761,6 +14386,10 @@
             <a:prstDash val="solid"/>
           </a:ln>
         </p:spPr>
+        <p:txBody>
+          <a:bodyPr/>
+          <a:p/>
+        </p:txBody>
       </p:sp>
       <p:sp>
         <p:nvSpPr>
@@ -13899,6 +14528,40 @@
               <a:t>5</a:t>
             </a:r>
             <a:endParaRPr lang="en-US" sz="900" dirty="0"/>
+          </a:p>
+        </p:txBody>
+      </p:sp>
+      <p:sp>
+        <p:nvSpPr>
+          <p:cNvPr id="15" name="TextBox 14"/>
+          <p:cNvSpPr txBox="1"/>
+          <p:nvPr/>
+        </p:nvSpPr>
+        <p:spPr>
+          <a:xfrm>
+            <a:off x="7589520" y="5943600"/>
+            <a:ext cx="3962095" cy="274320"/>
+          </a:xfrm>
+          <a:prstGeom prst="rect">
+            <a:avLst/>
+          </a:prstGeom>
+          <a:noFill/>
+        </p:spPr>
+        <p:txBody>
+          <a:bodyPr wrap="square" lIns="0" rIns="0" tIns="0" bIns="0" anchor="ctr">
+            <a:spAutoFit/>
+          </a:bodyPr>
+          <a:lstStyle/>
+          <a:p>
+            <a:r>
+              <a:rPr sz="850">
+                <a:solidFill>
+                  <a:srgbClr val="5F7075"/>
+                </a:solidFill>
+                <a:latin typeface="Courier New"/>
+              </a:rPr>
+              <a:t>실행: python examples/tool_calling_step_by_step.py --step 3</a:t>
+            </a:r>
           </a:p>
         </p:txBody>
       </p:sp>
@@ -14038,6 +14701,10 @@
             <a:prstDash val="solid"/>
           </a:ln>
         </p:spPr>
+        <p:txBody>
+          <a:bodyPr/>
+          <a:p/>
+        </p:txBody>
       </p:sp>
       <p:sp>
         <p:nvSpPr>
@@ -14063,6 +14730,10 @@
             <a:prstDash val="solid"/>
           </a:ln>
         </p:spPr>
+        <p:txBody>
+          <a:bodyPr/>
+          <a:p/>
+        </p:txBody>
       </p:sp>
       <p:sp>
         <p:nvSpPr>
@@ -14207,6 +14878,10 @@
             <a:tailEnd type="triangle"/>
           </a:ln>
         </p:spPr>
+        <p:txBody>
+          <a:bodyPr/>
+          <a:p/>
+        </p:txBody>
       </p:sp>
       <p:sp>
         <p:nvSpPr>
@@ -14234,6 +14909,10 @@
             <a:prstDash val="solid"/>
           </a:ln>
         </p:spPr>
+        <p:txBody>
+          <a:bodyPr/>
+          <a:p/>
+        </p:txBody>
       </p:sp>
       <p:sp>
         <p:nvSpPr>
@@ -14259,6 +14938,10 @@
             <a:prstDash val="solid"/>
           </a:ln>
         </p:spPr>
+        <p:txBody>
+          <a:bodyPr/>
+          <a:p/>
+        </p:txBody>
       </p:sp>
       <p:sp>
         <p:nvSpPr>
@@ -14403,6 +15086,10 @@
             <a:tailEnd type="triangle"/>
           </a:ln>
         </p:spPr>
+        <p:txBody>
+          <a:bodyPr/>
+          <a:p/>
+        </p:txBody>
       </p:sp>
       <p:sp>
         <p:nvSpPr>
@@ -14430,6 +15117,10 @@
             <a:prstDash val="solid"/>
           </a:ln>
         </p:spPr>
+        <p:txBody>
+          <a:bodyPr/>
+          <a:p/>
+        </p:txBody>
       </p:sp>
       <p:sp>
         <p:nvSpPr>
@@ -14455,6 +15146,10 @@
             <a:prstDash val="solid"/>
           </a:ln>
         </p:spPr>
+        <p:txBody>
+          <a:bodyPr/>
+          <a:p/>
+        </p:txBody>
       </p:sp>
       <p:sp>
         <p:nvSpPr>
@@ -14599,6 +15294,10 @@
             <a:tailEnd type="triangle"/>
           </a:ln>
         </p:spPr>
+        <p:txBody>
+          <a:bodyPr/>
+          <a:p/>
+        </p:txBody>
       </p:sp>
       <p:sp>
         <p:nvSpPr>
@@ -14626,6 +15325,10 @@
             <a:prstDash val="solid"/>
           </a:ln>
         </p:spPr>
+        <p:txBody>
+          <a:bodyPr/>
+          <a:p/>
+        </p:txBody>
       </p:sp>
       <p:sp>
         <p:nvSpPr>
@@ -14651,6 +15354,10 @@
             <a:prstDash val="solid"/>
           </a:ln>
         </p:spPr>
+        <p:txBody>
+          <a:bodyPr/>
+          <a:p/>
+        </p:txBody>
       </p:sp>
       <p:sp>
         <p:nvSpPr>
@@ -14795,6 +15502,10 @@
             <a:tailEnd type="triangle"/>
           </a:ln>
         </p:spPr>
+        <p:txBody>
+          <a:bodyPr/>
+          <a:p/>
+        </p:txBody>
       </p:sp>
       <p:sp>
         <p:nvSpPr>
@@ -14822,6 +15533,10 @@
             <a:prstDash val="solid"/>
           </a:ln>
         </p:spPr>
+        <p:txBody>
+          <a:bodyPr/>
+          <a:p/>
+        </p:txBody>
       </p:sp>
       <p:sp>
         <p:nvSpPr>
@@ -14847,6 +15562,10 @@
             <a:prstDash val="solid"/>
           </a:ln>
         </p:spPr>
+        <p:txBody>
+          <a:bodyPr/>
+          <a:p/>
+        </p:txBody>
       </p:sp>
       <p:sp>
         <p:nvSpPr>
@@ -14994,6 +15713,10 @@
             <a:prstDash val="solid"/>
           </a:ln>
         </p:spPr>
+        <p:txBody>
+          <a:bodyPr/>
+          <a:p/>
+        </p:txBody>
       </p:sp>
       <p:sp>
         <p:nvSpPr>
@@ -15317,6 +16040,10 @@
             </a:outerShdw>
           </a:effectLst>
         </p:spPr>
+        <p:txBody>
+          <a:bodyPr/>
+          <a:p/>
+        </p:txBody>
       </p:sp>
       <p:sp>
         <p:nvSpPr>
@@ -15342,6 +16069,10 @@
             <a:prstDash val="solid"/>
           </a:ln>
         </p:spPr>
+        <p:txBody>
+          <a:bodyPr/>
+          <a:p/>
+        </p:txBody>
       </p:sp>
       <p:sp>
         <p:nvSpPr>
@@ -15367,6 +16098,10 @@
             <a:prstDash val="solid"/>
           </a:ln>
         </p:spPr>
+        <p:txBody>
+          <a:bodyPr/>
+          <a:p/>
+        </p:txBody>
       </p:sp>
       <p:sp>
         <p:nvSpPr>
@@ -15392,6 +16127,10 @@
             <a:prstDash val="solid"/>
           </a:ln>
         </p:spPr>
+        <p:txBody>
+          <a:bodyPr/>
+          <a:p/>
+        </p:txBody>
       </p:sp>
       <p:sp>
         <p:nvSpPr>
@@ -17745,6 +18484,10 @@
             <a:prstDash val="solid"/>
           </a:ln>
         </p:spPr>
+        <p:txBody>
+          <a:bodyPr/>
+          <a:p/>
+        </p:txBody>
       </p:sp>
       <p:sp>
         <p:nvSpPr>
@@ -17834,6 +18577,10 @@
             <a:prstDash val="solid"/>
           </a:ln>
         </p:spPr>
+        <p:txBody>
+          <a:bodyPr/>
+          <a:p/>
+        </p:txBody>
       </p:sp>
       <p:sp>
         <p:nvSpPr>
@@ -17972,6 +18719,40 @@
               <a:t>7</a:t>
             </a:r>
             <a:endParaRPr lang="en-US" sz="900" dirty="0"/>
+          </a:p>
+        </p:txBody>
+      </p:sp>
+      <p:sp>
+        <p:nvSpPr>
+          <p:cNvPr id="15" name="TextBox 14"/>
+          <p:cNvSpPr txBox="1"/>
+          <p:nvPr/>
+        </p:nvSpPr>
+        <p:spPr>
+          <a:xfrm>
+            <a:off x="7589520" y="5943600"/>
+            <a:ext cx="3962095" cy="274320"/>
+          </a:xfrm>
+          <a:prstGeom prst="rect">
+            <a:avLst/>
+          </a:prstGeom>
+          <a:noFill/>
+        </p:spPr>
+        <p:txBody>
+          <a:bodyPr wrap="square" lIns="0" rIns="0" tIns="0" bIns="0" anchor="ctr">
+            <a:spAutoFit/>
+          </a:bodyPr>
+          <a:lstStyle/>
+          <a:p>
+            <a:r>
+              <a:rPr sz="850">
+                <a:solidFill>
+                  <a:srgbClr val="5F7075"/>
+                </a:solidFill>
+                <a:latin typeface="Courier New"/>
+              </a:rPr>
+              <a:t>실행: python examples/tool_calling_step_by_step.py --step 4</a:t>
+            </a:r>
           </a:p>
         </p:txBody>
       </p:sp>
@@ -18118,6 +18899,10 @@
             </a:outerShdw>
           </a:effectLst>
         </p:spPr>
+        <p:txBody>
+          <a:bodyPr/>
+          <a:p/>
+        </p:txBody>
       </p:sp>
       <p:sp>
         <p:nvSpPr>
@@ -18143,6 +18928,10 @@
             <a:prstDash val="solid"/>
           </a:ln>
         </p:spPr>
+        <p:txBody>
+          <a:bodyPr/>
+          <a:p/>
+        </p:txBody>
       </p:sp>
       <p:sp>
         <p:nvSpPr>
@@ -18168,6 +18957,10 @@
             <a:prstDash val="solid"/>
           </a:ln>
         </p:spPr>
+        <p:txBody>
+          <a:bodyPr/>
+          <a:p/>
+        </p:txBody>
       </p:sp>
       <p:sp>
         <p:nvSpPr>
@@ -18193,6 +18986,10 @@
             <a:prstDash val="solid"/>
           </a:ln>
         </p:spPr>
+        <p:txBody>
+          <a:bodyPr/>
+          <a:p/>
+        </p:txBody>
       </p:sp>
       <p:sp>
         <p:nvSpPr>
@@ -19959,6 +20756,10 @@
             <a:prstDash val="solid"/>
           </a:ln>
         </p:spPr>
+        <p:txBody>
+          <a:bodyPr/>
+          <a:p/>
+        </p:txBody>
       </p:sp>
       <p:sp>
         <p:nvSpPr>
@@ -20048,6 +20849,10 @@
             <a:prstDash val="solid"/>
           </a:ln>
         </p:spPr>
+        <p:txBody>
+          <a:bodyPr/>
+          <a:p/>
+        </p:txBody>
       </p:sp>
       <p:sp>
         <p:nvSpPr>
@@ -20186,6 +20991,40 @@
               <a:t>8</a:t>
             </a:r>
             <a:endParaRPr lang="en-US" sz="900" dirty="0"/>
+          </a:p>
+        </p:txBody>
+      </p:sp>
+      <p:sp>
+        <p:nvSpPr>
+          <p:cNvPr id="15" name="TextBox 14"/>
+          <p:cNvSpPr txBox="1"/>
+          <p:nvPr/>
+        </p:nvSpPr>
+        <p:spPr>
+          <a:xfrm>
+            <a:off x="7589520" y="5943600"/>
+            <a:ext cx="3962095" cy="274320"/>
+          </a:xfrm>
+          <a:prstGeom prst="rect">
+            <a:avLst/>
+          </a:prstGeom>
+          <a:noFill/>
+        </p:spPr>
+        <p:txBody>
+          <a:bodyPr wrap="square" lIns="0" rIns="0" tIns="0" bIns="0" anchor="ctr">
+            <a:spAutoFit/>
+          </a:bodyPr>
+          <a:lstStyle/>
+          <a:p>
+            <a:r>
+              <a:rPr sz="850">
+                <a:solidFill>
+                  <a:srgbClr val="5F7075"/>
+                </a:solidFill>
+                <a:latin typeface="Courier New"/>
+              </a:rPr>
+              <a:t>실행: python examples/tool_calling_step_by_step.py --step 5</a:t>
+            </a:r>
           </a:p>
         </p:txBody>
       </p:sp>
